--- a/Journal_Club_MBT_SelfHarm.pptx
+++ b/Journal_Club_MBT_SelfHarm.pptx
@@ -100,7 +100,7 @@
           <a:p>
             <a:r>
               <a:rPr lang="en-US" dirty="0"/>
-              <a:t>Open simply: 'Today I am presenting a 2024 paper that asks one clear question - does mentalization-based therapy (a talking therapy that helps people understand thoughts and feelings) actually reduce self-harm?' Explain it is a systematic review and meta-analysis: the authors did not run a new experiment; they collected earlier good-quality studies and combined them to get one overall result. Fill in your name, institution and date. Give the plan: the problem, why this therapy, how the review was done, what it found, and how strong the evidence really is.</a:t>
+              <a:t>Open simply: 'Today I am presenting a 2024 paper that asks one clear question - does mentalization-based therapy (a talking therapy that helps people understand thoughts and feelings) actually reduce self-harm?' Explain it is a systematic review and meta-analysis: the authors did not run a new experiment; they collected earlier good-quality studies and combined them to get one overall result. Introduce yourself (Ms. Sonal Tripathi, M.Phil. Year II) and acknowledge your supervisor (Dr. Ajay Sharma, Professor &amp; HoD). Give the plan: the problem, why this therapy, how the review was done, what it found, and how strong the evidence really is.</a:t>
             </a:r>
           </a:p>
         </p:txBody>
@@ -2011,8 +2011,8 @@
         </p:nvSpPr>
         <p:spPr>
           <a:xfrm>
-            <a:off x="900000" y="3320000"/>
-            <a:ext cx="10392000" cy="1000000"/>
+            <a:off x="900000" y="3180000"/>
+            <a:ext cx="10392000" cy="640000"/>
           </a:xfrm>
           <a:prstGeom prst="rect">
             <a:avLst/>
@@ -2026,12 +2026,12 @@
           <a:p>
             <a:pPr lvl="0" algn="ctr">
               <a:spcAft>
-                <a:spcPts val="200"/>
-              </a:spcAft>
-              <a:buNone/>
-            </a:pPr>
-            <a:r>
-              <a:rPr lang="en-US" sz="1400" b="1" dirty="0">
+                <a:spcPts val="0"/>
+              </a:spcAft>
+              <a:buNone/>
+            </a:pPr>
+            <a:r>
+              <a:rPr lang="en-US" sz="1300" b="1" dirty="0">
                 <a:solidFill>
                   <a:srgbClr val="3E7CB1"/>
                 </a:solidFill>
@@ -2040,7 +2040,7 @@
               <a:t>Journal: </a:t>
             </a:r>
             <a:r>
-              <a:rPr lang="en-US" sz="1400" dirty="0">
+              <a:rPr lang="en-US" sz="1300" dirty="0">
                 <a:solidFill>
                   <a:srgbClr val="2E2E38"/>
                 </a:solidFill>
@@ -2048,31 +2048,23 @@
               </a:rPr>
               <a:t>Suicide and Life-Threatening Behavior (2024)  •  DOI: 10.1111/sltb.13044</a:t>
             </a:r>
-          </a:p>
-          <a:p>
-            <a:pPr lvl="0" algn="ctr">
-              <a:spcAft>
-                <a:spcPts val="0"/>
-              </a:spcAft>
-              <a:buNone/>
-            </a:pPr>
-            <a:r>
-              <a:rPr lang="en-US" sz="1400" b="1" dirty="0">
+            <a:r>
+              <a:rPr lang="en-US" sz="1300" b="1" dirty="0">
                 <a:solidFill>
                   <a:srgbClr val="3E7CB1"/>
                 </a:solidFill>
                 <a:latin typeface="Calibri"/>
               </a:rPr>
-              <a:t>What kind of study: </a:t>
-            </a:r>
-            <a:r>
-              <a:rPr lang="en-US" sz="1400" dirty="0">
-                <a:solidFill>
-                  <a:srgbClr val="2E2E38"/>
-                </a:solidFill>
-                <a:latin typeface="Calibri"/>
-              </a:rPr>
-              <a:t>a systematic review + meta-analysis (a study that gathers all good earlier studies and combines their results into one overall answer).</a:t>
+              <a:t>      What kind of study: </a:t>
+            </a:r>
+            <a:r>
+              <a:rPr lang="en-US" sz="1300" dirty="0">
+                <a:solidFill>
+                  <a:srgbClr val="2E2E38"/>
+                </a:solidFill>
+                <a:latin typeface="Calibri"/>
+              </a:rPr>
+              <a:t>systematic review + meta-analysis (combines earlier studies into one overall answer).</a:t>
             </a:r>
           </a:p>
         </p:txBody>
@@ -2085,8 +2077,8 @@
         </p:nvSpPr>
         <p:spPr>
           <a:xfrm>
-            <a:off x="2400000" y="4650000"/>
-            <a:ext cx="7392000" cy="1150000"/>
+            <a:off x="900000" y="3900000"/>
+            <a:ext cx="5046000" cy="2350000"/>
           </a:xfrm>
           <a:prstGeom prst="roundRect">
             <a:avLst/>
@@ -2114,7 +2106,7 @@
           <a:p>
             <a:pPr lvl="0" algn="ctr">
               <a:spcAft>
-                <a:spcPts val="160"/>
+                <a:spcPts val="200"/>
               </a:spcAft>
               <a:buNone/>
             </a:pPr>
@@ -2125,22 +2117,30 @@
                 </a:solidFill>
                 <a:latin typeface="Calibri"/>
               </a:rPr>
-              <a:t>Presented by: </a:t>
-            </a:r>
-            <a:r>
-              <a:rPr lang="en-US" sz="1500" dirty="0">
-                <a:solidFill>
-                  <a:srgbClr val="2E2E38"/>
-                </a:solidFill>
-                <a:latin typeface="Calibri"/>
-              </a:rPr>
-              <a:t>Sonal ______________</a:t>
+              <a:t>Presented by</a:t>
             </a:r>
           </a:p>
           <a:p>
             <a:pPr lvl="0" algn="ctr">
               <a:spcAft>
-                <a:spcPts val="160"/>
+                <a:spcPts val="140"/>
+              </a:spcAft>
+              <a:buNone/>
+            </a:pPr>
+            <a:r>
+              <a:rPr lang="en-US" sz="1400" b="1" dirty="0">
+                <a:solidFill>
+                  <a:srgbClr val="2E2E38"/>
+                </a:solidFill>
+                <a:latin typeface="Calibri"/>
+              </a:rPr>
+              <a:t>Ms. Sonal Tripathi</a:t>
+            </a:r>
+          </a:p>
+          <a:p>
+            <a:pPr lvl="0" algn="ctr">
+              <a:spcAft>
+                <a:spcPts val="140"/>
               </a:spcAft>
               <a:buNone/>
             </a:pPr>
@@ -2151,13 +2151,13 @@
                 </a:solidFill>
                 <a:latin typeface="Calibri"/>
               </a:rPr>
-              <a:t>M.Phil. Clinical Psychology  •  Institution: ______________</a:t>
+              <a:t>M.Phil. Year II Trainee</a:t>
             </a:r>
           </a:p>
           <a:p>
             <a:pPr lvl="0" algn="ctr">
               <a:spcAft>
-                <a:spcPts val="0"/>
+                <a:spcPts val="140"/>
               </a:spcAft>
               <a:buNone/>
             </a:pPr>
@@ -2165,6 +2165,183 @@
               <a:rPr lang="en-US" sz="1400" dirty="0">
                 <a:solidFill>
                   <a:srgbClr val="2E2E38"/>
+                </a:solidFill>
+                <a:latin typeface="Calibri"/>
+              </a:rPr>
+              <a:t>Department of Clinical Psychology</a:t>
+            </a:r>
+          </a:p>
+          <a:p>
+            <a:pPr lvl="0" algn="ctr">
+              <a:spcAft>
+                <a:spcPts val="0"/>
+              </a:spcAft>
+              <a:buNone/>
+            </a:pPr>
+            <a:r>
+              <a:rPr lang="en-US" sz="1400" dirty="0">
+                <a:solidFill>
+                  <a:srgbClr val="2E2E38"/>
+                </a:solidFill>
+                <a:latin typeface="Calibri"/>
+              </a:rPr>
+              <a:t>MAN College of Special Education and Psychological Studies, Guna, M.P.</a:t>
+            </a:r>
+          </a:p>
+        </p:txBody>
+      </p:sp>
+      <p:sp>
+        <p:nvSpPr>
+          <p:cNvPr id="11" name="card"/>
+          <p:cNvSpPr/>
+          <p:nvPr/>
+        </p:nvSpPr>
+        <p:spPr>
+          <a:xfrm>
+            <a:off x="6246000" y="3900000"/>
+            <a:ext cx="5046000" cy="2350000"/>
+          </a:xfrm>
+          <a:prstGeom prst="roundRect">
+            <a:avLst/>
+          </a:prstGeom>
+          <a:solidFill>
+            <a:srgbClr val="D5EFE6"/>
+          </a:solidFill>
+          <a:ln w="12700">
+            <a:solidFill>
+              <a:srgbClr val="D9E8D2"/>
+            </a:solidFill>
+          </a:ln>
+          <a:effectLst>
+            <a:outerShdw blurRad="40000" dist="20000" dir="5400000" rotWithShape="0">
+              <a:srgbClr val="9AA0A6">
+                <a:alpha val="38000"/>
+              </a:srgbClr>
+            </a:outerShdw>
+          </a:effectLst>
+        </p:spPr>
+        <p:txBody>
+          <a:bodyPr wrap="square" anchor="ctr" lIns="91440" tIns="45720" rIns="91440" bIns="45720">
+            <a:normAutofit/>
+          </a:bodyPr>
+          <a:p>
+            <a:pPr lvl="0" algn="ctr">
+              <a:spcAft>
+                <a:spcPts val="200"/>
+              </a:spcAft>
+              <a:buNone/>
+            </a:pPr>
+            <a:r>
+              <a:rPr lang="en-US" sz="1500" b="1" dirty="0">
+                <a:solidFill>
+                  <a:srgbClr val="6E5AA6"/>
+                </a:solidFill>
+                <a:latin typeface="Calibri"/>
+              </a:rPr>
+              <a:t>Supervised by</a:t>
+            </a:r>
+          </a:p>
+          <a:p>
+            <a:pPr lvl="0" algn="ctr">
+              <a:spcAft>
+                <a:spcPts val="140"/>
+              </a:spcAft>
+              <a:buNone/>
+            </a:pPr>
+            <a:r>
+              <a:rPr lang="en-US" sz="1400" b="1" dirty="0">
+                <a:solidFill>
+                  <a:srgbClr val="2E2E38"/>
+                </a:solidFill>
+                <a:latin typeface="Calibri"/>
+              </a:rPr>
+              <a:t>Dr. Ajay Sharma</a:t>
+            </a:r>
+          </a:p>
+          <a:p>
+            <a:pPr lvl="0" algn="ctr">
+              <a:spcAft>
+                <a:spcPts val="140"/>
+              </a:spcAft>
+              <a:buNone/>
+            </a:pPr>
+            <a:r>
+              <a:rPr lang="en-US" sz="1400" dirty="0">
+                <a:solidFill>
+                  <a:srgbClr val="2E2E38"/>
+                </a:solidFill>
+                <a:latin typeface="Calibri"/>
+              </a:rPr>
+              <a:t>Professor &amp; Head of Department</a:t>
+            </a:r>
+          </a:p>
+          <a:p>
+            <a:pPr lvl="0" algn="ctr">
+              <a:spcAft>
+                <a:spcPts val="140"/>
+              </a:spcAft>
+              <a:buNone/>
+            </a:pPr>
+            <a:r>
+              <a:rPr lang="en-US" sz="1400" dirty="0">
+                <a:solidFill>
+                  <a:srgbClr val="2E2E38"/>
+                </a:solidFill>
+                <a:latin typeface="Calibri"/>
+              </a:rPr>
+              <a:t>Department of Clinical Psychology</a:t>
+            </a:r>
+          </a:p>
+          <a:p>
+            <a:pPr lvl="0" algn="ctr">
+              <a:spcAft>
+                <a:spcPts val="0"/>
+              </a:spcAft>
+              <a:buNone/>
+            </a:pPr>
+            <a:r>
+              <a:rPr lang="en-US" sz="1400" dirty="0">
+                <a:solidFill>
+                  <a:srgbClr val="2E2E38"/>
+                </a:solidFill>
+                <a:latin typeface="Calibri"/>
+              </a:rPr>
+              <a:t>MAN College of Special Education and Psychological Studies, Guna, M.P.</a:t>
+            </a:r>
+          </a:p>
+        </p:txBody>
+      </p:sp>
+      <p:sp>
+        <p:nvSpPr>
+          <p:cNvPr id="12" name="tb"/>
+          <p:cNvSpPr txBox="1"/>
+          <p:nvPr/>
+        </p:nvSpPr>
+        <p:spPr>
+          <a:xfrm>
+            <a:off x="900000" y="6370000"/>
+            <a:ext cx="10392000" cy="320000"/>
+          </a:xfrm>
+          <a:prstGeom prst="rect">
+            <a:avLst/>
+          </a:prstGeom>
+          <a:noFill/>
+        </p:spPr>
+        <p:txBody>
+          <a:bodyPr wrap="square" anchor="t" lIns="45720" tIns="27432" rIns="45720" bIns="27432">
+            <a:normAutofit/>
+          </a:bodyPr>
+          <a:p>
+            <a:pPr lvl="0" algn="ctr">
+              <a:spcAft>
+                <a:spcPts val="0"/>
+              </a:spcAft>
+              <a:buNone/>
+            </a:pPr>
+            <a:r>
+              <a:rPr lang="en-US" sz="1300" dirty="0">
+                <a:solidFill>
+                  <a:srgbClr val="6B6B75"/>
                 </a:solidFill>
                 <a:latin typeface="Calibri"/>
               </a:rPr>
@@ -2200,7 +2377,7 @@
       </p:grpSpPr>
       <p:sp>
         <p:nvSpPr>
-          <p:cNvPr id="141" name="r"/>
+          <p:cNvPr id="143" name="r"/>
           <p:cNvSpPr/>
           <p:nvPr/>
         </p:nvSpPr>
@@ -2232,7 +2409,7 @@
       </p:sp>
       <p:sp>
         <p:nvSpPr>
-          <p:cNvPr id="142" name="tb"/>
+          <p:cNvPr id="144" name="tb"/>
           <p:cNvSpPr txBox="1"/>
           <p:nvPr/>
         </p:nvSpPr>
@@ -2271,7 +2448,7 @@
       </p:sp>
       <p:sp>
         <p:nvSpPr>
-          <p:cNvPr id="143" name="tb"/>
+          <p:cNvPr id="145" name="tb"/>
           <p:cNvSpPr txBox="1"/>
           <p:nvPr/>
         </p:nvSpPr>
@@ -2310,7 +2487,7 @@
       </p:sp>
       <p:cxnSp>
         <p:nvCxnSpPr>
-          <p:cNvPr id="144" name="ln"/>
+          <p:cNvPr id="146" name="ln"/>
           <p:cNvCxnSpPr/>
           <p:nvPr/>
         </p:nvCxnSpPr>
@@ -2331,7 +2508,7 @@
       </p:cxnSp>
       <p:sp>
         <p:nvSpPr>
-          <p:cNvPr id="145" name="tb"/>
+          <p:cNvPr id="147" name="tb"/>
           <p:cNvSpPr txBox="1"/>
           <p:nvPr/>
         </p:nvSpPr>
@@ -2370,7 +2547,7 @@
       </p:sp>
       <p:sp>
         <p:nvSpPr>
-          <p:cNvPr id="146" name="r"/>
+          <p:cNvPr id="148" name="r"/>
           <p:cNvSpPr/>
           <p:nvPr/>
         </p:nvSpPr>
@@ -2404,7 +2581,7 @@
       </p:sp>
       <p:sp>
         <p:nvSpPr>
-          <p:cNvPr id="147" name="card"/>
+          <p:cNvPr id="149" name="card"/>
           <p:cNvSpPr/>
           <p:nvPr/>
         </p:nvSpPr>
@@ -2435,7 +2612,7 @@
       </p:sp>
       <p:sp>
         <p:nvSpPr>
-          <p:cNvPr id="148" name="tb"/>
+          <p:cNvPr id="150" name="tb"/>
           <p:cNvSpPr txBox="1"/>
           <p:nvPr/>
         </p:nvSpPr>
@@ -2474,7 +2651,7 @@
       </p:sp>
       <p:sp>
         <p:nvSpPr>
-          <p:cNvPr id="149" name="tb"/>
+          <p:cNvPr id="151" name="tb"/>
           <p:cNvSpPr txBox="1"/>
           <p:nvPr/>
         </p:nvSpPr>
@@ -2513,7 +2690,7 @@
       </p:sp>
       <p:sp>
         <p:nvSpPr>
-          <p:cNvPr id="150" name="r"/>
+          <p:cNvPr id="152" name="r"/>
           <p:cNvSpPr/>
           <p:nvPr/>
         </p:nvSpPr>
@@ -2547,7 +2724,7 @@
       </p:sp>
       <p:sp>
         <p:nvSpPr>
-          <p:cNvPr id="151" name="card"/>
+          <p:cNvPr id="153" name="card"/>
           <p:cNvSpPr/>
           <p:nvPr/>
         </p:nvSpPr>
@@ -2578,7 +2755,7 @@
       </p:sp>
       <p:sp>
         <p:nvSpPr>
-          <p:cNvPr id="152" name="tb"/>
+          <p:cNvPr id="154" name="tb"/>
           <p:cNvSpPr txBox="1"/>
           <p:nvPr/>
         </p:nvSpPr>
@@ -2617,7 +2794,7 @@
       </p:sp>
       <p:sp>
         <p:nvSpPr>
-          <p:cNvPr id="153" name="tb"/>
+          <p:cNvPr id="155" name="tb"/>
           <p:cNvSpPr txBox="1"/>
           <p:nvPr/>
         </p:nvSpPr>
@@ -2656,7 +2833,7 @@
       </p:sp>
       <p:sp>
         <p:nvSpPr>
-          <p:cNvPr id="154" name="r"/>
+          <p:cNvPr id="156" name="r"/>
           <p:cNvSpPr/>
           <p:nvPr/>
         </p:nvSpPr>
@@ -2690,7 +2867,7 @@
       </p:sp>
       <p:sp>
         <p:nvSpPr>
-          <p:cNvPr id="155" name="card"/>
+          <p:cNvPr id="157" name="card"/>
           <p:cNvSpPr/>
           <p:nvPr/>
         </p:nvSpPr>
@@ -2721,7 +2898,7 @@
       </p:sp>
       <p:sp>
         <p:nvSpPr>
-          <p:cNvPr id="156" name="tb"/>
+          <p:cNvPr id="158" name="tb"/>
           <p:cNvSpPr txBox="1"/>
           <p:nvPr/>
         </p:nvSpPr>
@@ -2760,7 +2937,7 @@
       </p:sp>
       <p:sp>
         <p:nvSpPr>
-          <p:cNvPr id="157" name="tb"/>
+          <p:cNvPr id="159" name="tb"/>
           <p:cNvSpPr txBox="1"/>
           <p:nvPr/>
         </p:nvSpPr>
@@ -2799,7 +2976,7 @@
       </p:sp>
       <p:sp>
         <p:nvSpPr>
-          <p:cNvPr id="158" name="r"/>
+          <p:cNvPr id="160" name="r"/>
           <p:cNvSpPr/>
           <p:nvPr/>
         </p:nvSpPr>
@@ -2833,7 +3010,7 @@
       </p:sp>
       <p:sp>
         <p:nvSpPr>
-          <p:cNvPr id="159" name="card"/>
+          <p:cNvPr id="161" name="card"/>
           <p:cNvSpPr/>
           <p:nvPr/>
         </p:nvSpPr>
@@ -2864,7 +3041,7 @@
       </p:sp>
       <p:sp>
         <p:nvSpPr>
-          <p:cNvPr id="160" name="tb"/>
+          <p:cNvPr id="162" name="tb"/>
           <p:cNvSpPr txBox="1"/>
           <p:nvPr/>
         </p:nvSpPr>
@@ -2903,7 +3080,7 @@
       </p:sp>
       <p:sp>
         <p:nvSpPr>
-          <p:cNvPr id="161" name="tb"/>
+          <p:cNvPr id="163" name="tb"/>
           <p:cNvSpPr txBox="1"/>
           <p:nvPr/>
         </p:nvSpPr>
@@ -2942,7 +3119,7 @@
       </p:sp>
       <p:sp>
         <p:nvSpPr>
-          <p:cNvPr id="162" name="r"/>
+          <p:cNvPr id="164" name="r"/>
           <p:cNvSpPr/>
           <p:nvPr/>
         </p:nvSpPr>
@@ -2976,7 +3153,7 @@
       </p:sp>
       <p:sp>
         <p:nvSpPr>
-          <p:cNvPr id="163" name="card"/>
+          <p:cNvPr id="165" name="card"/>
           <p:cNvSpPr/>
           <p:nvPr/>
         </p:nvSpPr>
@@ -3007,7 +3184,7 @@
       </p:sp>
       <p:sp>
         <p:nvSpPr>
-          <p:cNvPr id="164" name="tb"/>
+          <p:cNvPr id="166" name="tb"/>
           <p:cNvSpPr txBox="1"/>
           <p:nvPr/>
         </p:nvSpPr>
@@ -3046,7 +3223,7 @@
       </p:sp>
       <p:sp>
         <p:nvSpPr>
-          <p:cNvPr id="165" name="card"/>
+          <p:cNvPr id="167" name="card"/>
           <p:cNvSpPr/>
           <p:nvPr/>
         </p:nvSpPr>
@@ -3108,7 +3285,7 @@
       </p:sp>
       <p:sp>
         <p:nvSpPr>
-          <p:cNvPr id="166" name="tb"/>
+          <p:cNvPr id="168" name="tb"/>
           <p:cNvSpPr txBox="1"/>
           <p:nvPr/>
         </p:nvSpPr>
@@ -3147,7 +3324,7 @@
       </p:sp>
       <p:sp>
         <p:nvSpPr>
-          <p:cNvPr id="167" name="tb"/>
+          <p:cNvPr id="169" name="tb"/>
           <p:cNvSpPr txBox="1"/>
           <p:nvPr/>
         </p:nvSpPr>
@@ -3211,7 +3388,7 @@
       </p:grpSpPr>
       <p:sp>
         <p:nvSpPr>
-          <p:cNvPr id="168" name="r"/>
+          <p:cNvPr id="170" name="r"/>
           <p:cNvSpPr/>
           <p:nvPr/>
         </p:nvSpPr>
@@ -3243,7 +3420,7 @@
       </p:sp>
       <p:sp>
         <p:nvSpPr>
-          <p:cNvPr id="169" name="tb"/>
+          <p:cNvPr id="171" name="tb"/>
           <p:cNvSpPr txBox="1"/>
           <p:nvPr/>
         </p:nvSpPr>
@@ -3282,7 +3459,7 @@
       </p:sp>
       <p:sp>
         <p:nvSpPr>
-          <p:cNvPr id="170" name="tb"/>
+          <p:cNvPr id="172" name="tb"/>
           <p:cNvSpPr txBox="1"/>
           <p:nvPr/>
         </p:nvSpPr>
@@ -3321,7 +3498,7 @@
       </p:sp>
       <p:cxnSp>
         <p:nvCxnSpPr>
-          <p:cNvPr id="171" name="ln"/>
+          <p:cNvPr id="173" name="ln"/>
           <p:cNvCxnSpPr/>
           <p:nvPr/>
         </p:nvCxnSpPr>
@@ -3342,7 +3519,7 @@
       </p:cxnSp>
       <p:sp>
         <p:nvSpPr>
-          <p:cNvPr id="172" name="card"/>
+          <p:cNvPr id="174" name="card"/>
           <p:cNvSpPr/>
           <p:nvPr/>
         </p:nvSpPr>
@@ -3481,7 +3658,7 @@
       </p:sp>
       <p:sp>
         <p:nvSpPr>
-          <p:cNvPr id="173" name="tb"/>
+          <p:cNvPr id="175" name="tb"/>
           <p:cNvSpPr txBox="1"/>
           <p:nvPr/>
         </p:nvSpPr>
@@ -3520,7 +3697,7 @@
       </p:sp>
       <p:sp>
         <p:nvSpPr>
-          <p:cNvPr id="174" name="tb"/>
+          <p:cNvPr id="176" name="tb"/>
           <p:cNvSpPr txBox="1"/>
           <p:nvPr/>
         </p:nvSpPr>
@@ -3584,7 +3761,7 @@
       </p:grpSpPr>
       <p:sp>
         <p:nvSpPr>
-          <p:cNvPr id="175" name="r"/>
+          <p:cNvPr id="177" name="r"/>
           <p:cNvSpPr/>
           <p:nvPr/>
         </p:nvSpPr>
@@ -3616,7 +3793,7 @@
       </p:sp>
       <p:sp>
         <p:nvSpPr>
-          <p:cNvPr id="176" name="tb"/>
+          <p:cNvPr id="178" name="tb"/>
           <p:cNvSpPr txBox="1"/>
           <p:nvPr/>
         </p:nvSpPr>
@@ -3655,7 +3832,7 @@
       </p:sp>
       <p:sp>
         <p:nvSpPr>
-          <p:cNvPr id="177" name="tb"/>
+          <p:cNvPr id="179" name="tb"/>
           <p:cNvSpPr txBox="1"/>
           <p:nvPr/>
         </p:nvSpPr>
@@ -3694,7 +3871,7 @@
       </p:sp>
       <p:cxnSp>
         <p:nvCxnSpPr>
-          <p:cNvPr id="178" name="ln"/>
+          <p:cNvPr id="180" name="ln"/>
           <p:cNvCxnSpPr/>
           <p:nvPr/>
         </p:nvCxnSpPr>
@@ -3715,7 +3892,7 @@
       </p:cxnSp>
       <p:sp>
         <p:nvSpPr>
-          <p:cNvPr id="179" name="card"/>
+          <p:cNvPr id="181" name="card"/>
           <p:cNvSpPr/>
           <p:nvPr/>
         </p:nvSpPr>
@@ -3836,7 +4013,7 @@
       </p:sp>
       <p:sp>
         <p:nvSpPr>
-          <p:cNvPr id="180" name="tb"/>
+          <p:cNvPr id="182" name="tb"/>
           <p:cNvSpPr txBox="1"/>
           <p:nvPr/>
         </p:nvSpPr>
@@ -3875,7 +4052,7 @@
       </p:sp>
       <p:sp>
         <p:nvSpPr>
-          <p:cNvPr id="181" name="tb"/>
+          <p:cNvPr id="183" name="tb"/>
           <p:cNvSpPr txBox="1"/>
           <p:nvPr/>
         </p:nvSpPr>
@@ -3939,7 +4116,7 @@
       </p:grpSpPr>
       <p:sp>
         <p:nvSpPr>
-          <p:cNvPr id="182" name="r"/>
+          <p:cNvPr id="184" name="r"/>
           <p:cNvSpPr/>
           <p:nvPr/>
         </p:nvSpPr>
@@ -3971,7 +4148,7 @@
       </p:sp>
       <p:sp>
         <p:nvSpPr>
-          <p:cNvPr id="183" name="tb"/>
+          <p:cNvPr id="185" name="tb"/>
           <p:cNvSpPr txBox="1"/>
           <p:nvPr/>
         </p:nvSpPr>
@@ -4010,7 +4187,7 @@
       </p:sp>
       <p:sp>
         <p:nvSpPr>
-          <p:cNvPr id="184" name="tb"/>
+          <p:cNvPr id="186" name="tb"/>
           <p:cNvSpPr txBox="1"/>
           <p:nvPr/>
         </p:nvSpPr>
@@ -4049,7 +4226,7 @@
       </p:sp>
       <p:cxnSp>
         <p:nvCxnSpPr>
-          <p:cNvPr id="185" name="ln"/>
+          <p:cNvPr id="187" name="ln"/>
           <p:cNvCxnSpPr/>
           <p:nvPr/>
         </p:nvCxnSpPr>
@@ -4070,7 +4247,7 @@
       </p:cxnSp>
       <p:sp>
         <p:nvSpPr>
-          <p:cNvPr id="186" name="card"/>
+          <p:cNvPr id="188" name="card"/>
           <p:cNvSpPr/>
           <p:nvPr/>
         </p:nvSpPr>
@@ -4132,7 +4309,7 @@
       </p:sp>
       <p:sp>
         <p:nvSpPr>
-          <p:cNvPr id="187" name="card"/>
+          <p:cNvPr id="189" name="card"/>
           <p:cNvSpPr/>
           <p:nvPr/>
         </p:nvSpPr>
@@ -4194,7 +4371,7 @@
       </p:sp>
       <p:sp>
         <p:nvSpPr>
-          <p:cNvPr id="188" name="card"/>
+          <p:cNvPr id="190" name="card"/>
           <p:cNvSpPr/>
           <p:nvPr/>
         </p:nvSpPr>
@@ -4256,7 +4433,7 @@
       </p:sp>
       <p:sp>
         <p:nvSpPr>
-          <p:cNvPr id="189" name="tb"/>
+          <p:cNvPr id="191" name="tb"/>
           <p:cNvSpPr txBox="1"/>
           <p:nvPr/>
         </p:nvSpPr>
@@ -4295,7 +4472,7 @@
       </p:sp>
       <p:sp>
         <p:nvSpPr>
-          <p:cNvPr id="190" name="tb"/>
+          <p:cNvPr id="192" name="tb"/>
           <p:cNvSpPr txBox="1"/>
           <p:nvPr/>
         </p:nvSpPr>
@@ -4359,7 +4536,7 @@
       </p:grpSpPr>
       <p:sp>
         <p:nvSpPr>
-          <p:cNvPr id="191" name="r"/>
+          <p:cNvPr id="193" name="r"/>
           <p:cNvSpPr/>
           <p:nvPr/>
         </p:nvSpPr>
@@ -4391,7 +4568,7 @@
       </p:sp>
       <p:sp>
         <p:nvSpPr>
-          <p:cNvPr id="192" name="tb"/>
+          <p:cNvPr id="194" name="tb"/>
           <p:cNvSpPr txBox="1"/>
           <p:nvPr/>
         </p:nvSpPr>
@@ -4430,7 +4607,7 @@
       </p:sp>
       <p:sp>
         <p:nvSpPr>
-          <p:cNvPr id="193" name="tb"/>
+          <p:cNvPr id="195" name="tb"/>
           <p:cNvSpPr txBox="1"/>
           <p:nvPr/>
         </p:nvSpPr>
@@ -4469,7 +4646,7 @@
       </p:sp>
       <p:cxnSp>
         <p:nvCxnSpPr>
-          <p:cNvPr id="194" name="ln"/>
+          <p:cNvPr id="196" name="ln"/>
           <p:cNvCxnSpPr/>
           <p:nvPr/>
         </p:nvCxnSpPr>
@@ -4490,7 +4667,7 @@
       </p:cxnSp>
       <p:sp>
         <p:nvSpPr>
-          <p:cNvPr id="195" name="tb"/>
+          <p:cNvPr id="197" name="tb"/>
           <p:cNvSpPr txBox="1"/>
           <p:nvPr/>
         </p:nvSpPr>
@@ -4529,7 +4706,7 @@
       </p:sp>
       <p:sp>
         <p:nvSpPr>
-          <p:cNvPr id="196" name="card"/>
+          <p:cNvPr id="198" name="card"/>
           <p:cNvSpPr/>
           <p:nvPr/>
         </p:nvSpPr>
@@ -4594,7 +4771,7 @@
       </p:sp>
       <p:sp>
         <p:nvSpPr>
-          <p:cNvPr id="197" name="card"/>
+          <p:cNvPr id="199" name="card"/>
           <p:cNvSpPr/>
           <p:nvPr/>
         </p:nvSpPr>
@@ -4659,7 +4836,7 @@
       </p:sp>
       <p:sp>
         <p:nvSpPr>
-          <p:cNvPr id="198" name="card"/>
+          <p:cNvPr id="200" name="card"/>
           <p:cNvSpPr/>
           <p:nvPr/>
         </p:nvSpPr>
@@ -4724,7 +4901,7 @@
       </p:sp>
       <p:sp>
         <p:nvSpPr>
-          <p:cNvPr id="199" name="card"/>
+          <p:cNvPr id="201" name="card"/>
           <p:cNvSpPr/>
           <p:nvPr/>
         </p:nvSpPr>
@@ -4789,7 +4966,7 @@
       </p:sp>
       <p:sp>
         <p:nvSpPr>
-          <p:cNvPr id="200" name="tb"/>
+          <p:cNvPr id="202" name="tb"/>
           <p:cNvSpPr txBox="1"/>
           <p:nvPr/>
         </p:nvSpPr>
@@ -4828,7 +5005,7 @@
       </p:sp>
       <p:sp>
         <p:nvSpPr>
-          <p:cNvPr id="201" name="tb"/>
+          <p:cNvPr id="203" name="tb"/>
           <p:cNvSpPr txBox="1"/>
           <p:nvPr/>
         </p:nvSpPr>
@@ -4892,7 +5069,7 @@
       </p:grpSpPr>
       <p:sp>
         <p:nvSpPr>
-          <p:cNvPr id="202" name="r"/>
+          <p:cNvPr id="204" name="r"/>
           <p:cNvSpPr/>
           <p:nvPr/>
         </p:nvSpPr>
@@ -4924,7 +5101,7 @@
       </p:sp>
       <p:sp>
         <p:nvSpPr>
-          <p:cNvPr id="203" name="tb"/>
+          <p:cNvPr id="205" name="tb"/>
           <p:cNvSpPr txBox="1"/>
           <p:nvPr/>
         </p:nvSpPr>
@@ -4963,7 +5140,7 @@
       </p:sp>
       <p:sp>
         <p:nvSpPr>
-          <p:cNvPr id="204" name="tb"/>
+          <p:cNvPr id="206" name="tb"/>
           <p:cNvSpPr txBox="1"/>
           <p:nvPr/>
         </p:nvSpPr>
@@ -5002,7 +5179,7 @@
       </p:sp>
       <p:cxnSp>
         <p:nvCxnSpPr>
-          <p:cNvPr id="205" name="ln"/>
+          <p:cNvPr id="207" name="ln"/>
           <p:cNvCxnSpPr/>
           <p:nvPr/>
         </p:nvCxnSpPr>
@@ -5023,7 +5200,7 @@
       </p:cxnSp>
       <p:sp>
         <p:nvSpPr>
-          <p:cNvPr id="206" name="card"/>
+          <p:cNvPr id="208" name="card"/>
           <p:cNvSpPr/>
           <p:nvPr/>
         </p:nvSpPr>
@@ -5093,7 +5270,7 @@
       </p:sp>
       <p:sp>
         <p:nvSpPr>
-          <p:cNvPr id="207" name="ar"/>
+          <p:cNvPr id="209" name="ar"/>
           <p:cNvSpPr/>
           <p:nvPr/>
         </p:nvSpPr>
@@ -5116,7 +5293,7 @@
       </p:sp>
       <p:sp>
         <p:nvSpPr>
-          <p:cNvPr id="208" name="card"/>
+          <p:cNvPr id="210" name="card"/>
           <p:cNvSpPr/>
           <p:nvPr/>
         </p:nvSpPr>
@@ -5186,7 +5363,7 @@
       </p:sp>
       <p:sp>
         <p:nvSpPr>
-          <p:cNvPr id="209" name="ar"/>
+          <p:cNvPr id="211" name="ar"/>
           <p:cNvSpPr/>
           <p:nvPr/>
         </p:nvSpPr>
@@ -5209,7 +5386,7 @@
       </p:sp>
       <p:sp>
         <p:nvSpPr>
-          <p:cNvPr id="210" name="card"/>
+          <p:cNvPr id="212" name="card"/>
           <p:cNvSpPr/>
           <p:nvPr/>
         </p:nvSpPr>
@@ -5279,7 +5456,7 @@
       </p:sp>
       <p:sp>
         <p:nvSpPr>
-          <p:cNvPr id="211" name="ar"/>
+          <p:cNvPr id="213" name="ar"/>
           <p:cNvSpPr/>
           <p:nvPr/>
         </p:nvSpPr>
@@ -5302,7 +5479,7 @@
       </p:sp>
       <p:sp>
         <p:nvSpPr>
-          <p:cNvPr id="212" name="card"/>
+          <p:cNvPr id="214" name="card"/>
           <p:cNvSpPr/>
           <p:nvPr/>
         </p:nvSpPr>
@@ -5372,7 +5549,7 @@
       </p:sp>
       <p:sp>
         <p:nvSpPr>
-          <p:cNvPr id="213" name="ar"/>
+          <p:cNvPr id="215" name="ar"/>
           <p:cNvSpPr/>
           <p:nvPr/>
         </p:nvSpPr>
@@ -5395,7 +5572,7 @@
       </p:sp>
       <p:sp>
         <p:nvSpPr>
-          <p:cNvPr id="214" name="card"/>
+          <p:cNvPr id="216" name="card"/>
           <p:cNvSpPr/>
           <p:nvPr/>
         </p:nvSpPr>
@@ -5465,7 +5642,7 @@
       </p:sp>
       <p:sp>
         <p:nvSpPr>
-          <p:cNvPr id="215" name="card"/>
+          <p:cNvPr id="217" name="card"/>
           <p:cNvSpPr/>
           <p:nvPr/>
         </p:nvSpPr>
@@ -5527,7 +5704,7 @@
       </p:sp>
       <p:sp>
         <p:nvSpPr>
-          <p:cNvPr id="216" name="card"/>
+          <p:cNvPr id="218" name="card"/>
           <p:cNvSpPr/>
           <p:nvPr/>
         </p:nvSpPr>
@@ -5589,7 +5766,7 @@
       </p:sp>
       <p:sp>
         <p:nvSpPr>
-          <p:cNvPr id="217" name="tb"/>
+          <p:cNvPr id="219" name="tb"/>
           <p:cNvSpPr txBox="1"/>
           <p:nvPr/>
         </p:nvSpPr>
@@ -5628,7 +5805,7 @@
       </p:sp>
       <p:sp>
         <p:nvSpPr>
-          <p:cNvPr id="218" name="tb"/>
+          <p:cNvPr id="220" name="tb"/>
           <p:cNvSpPr txBox="1"/>
           <p:nvPr/>
         </p:nvSpPr>
@@ -5692,7 +5869,7 @@
       </p:grpSpPr>
       <p:sp>
         <p:nvSpPr>
-          <p:cNvPr id="219" name="r"/>
+          <p:cNvPr id="221" name="r"/>
           <p:cNvSpPr/>
           <p:nvPr/>
         </p:nvSpPr>
@@ -5724,7 +5901,7 @@
       </p:sp>
       <p:sp>
         <p:nvSpPr>
-          <p:cNvPr id="220" name="tb"/>
+          <p:cNvPr id="222" name="tb"/>
           <p:cNvSpPr txBox="1"/>
           <p:nvPr/>
         </p:nvSpPr>
@@ -5763,7 +5940,7 @@
       </p:sp>
       <p:sp>
         <p:nvSpPr>
-          <p:cNvPr id="221" name="tb"/>
+          <p:cNvPr id="223" name="tb"/>
           <p:cNvSpPr txBox="1"/>
           <p:nvPr/>
         </p:nvSpPr>
@@ -5802,7 +5979,7 @@
       </p:sp>
       <p:cxnSp>
         <p:nvCxnSpPr>
-          <p:cNvPr id="222" name="ln"/>
+          <p:cNvPr id="224" name="ln"/>
           <p:cNvCxnSpPr/>
           <p:nvPr/>
         </p:nvCxnSpPr>
@@ -5823,7 +6000,7 @@
       </p:cxnSp>
       <p:sp>
         <p:nvSpPr>
-          <p:cNvPr id="223" name="card"/>
+          <p:cNvPr id="225" name="card"/>
           <p:cNvSpPr/>
           <p:nvPr/>
         </p:nvSpPr>
@@ -5979,7 +6156,7 @@
       </p:sp>
       <p:sp>
         <p:nvSpPr>
-          <p:cNvPr id="224" name="card"/>
+          <p:cNvPr id="226" name="card"/>
           <p:cNvSpPr/>
           <p:nvPr/>
         </p:nvSpPr>
@@ -6135,7 +6312,7 @@
       </p:sp>
       <p:sp>
         <p:nvSpPr>
-          <p:cNvPr id="225" name="tb"/>
+          <p:cNvPr id="227" name="tb"/>
           <p:cNvSpPr txBox="1"/>
           <p:nvPr/>
         </p:nvSpPr>
@@ -6174,7 +6351,7 @@
       </p:sp>
       <p:sp>
         <p:nvSpPr>
-          <p:cNvPr id="226" name="tb"/>
+          <p:cNvPr id="228" name="tb"/>
           <p:cNvSpPr txBox="1"/>
           <p:nvPr/>
         </p:nvSpPr>
@@ -6238,7 +6415,7 @@
       </p:grpSpPr>
       <p:sp>
         <p:nvSpPr>
-          <p:cNvPr id="227" name="r"/>
+          <p:cNvPr id="229" name="r"/>
           <p:cNvSpPr/>
           <p:nvPr/>
         </p:nvSpPr>
@@ -6270,7 +6447,7 @@
       </p:sp>
       <p:sp>
         <p:nvSpPr>
-          <p:cNvPr id="228" name="tb"/>
+          <p:cNvPr id="230" name="tb"/>
           <p:cNvSpPr txBox="1"/>
           <p:nvPr/>
         </p:nvSpPr>
@@ -6309,7 +6486,7 @@
       </p:sp>
       <p:sp>
         <p:nvSpPr>
-          <p:cNvPr id="229" name="tb"/>
+          <p:cNvPr id="231" name="tb"/>
           <p:cNvSpPr txBox="1"/>
           <p:nvPr/>
         </p:nvSpPr>
@@ -6348,7 +6525,7 @@
       </p:sp>
       <p:cxnSp>
         <p:nvCxnSpPr>
-          <p:cNvPr id="230" name="ln"/>
+          <p:cNvPr id="232" name="ln"/>
           <p:cNvCxnSpPr/>
           <p:nvPr/>
         </p:nvCxnSpPr>
@@ -6369,7 +6546,7 @@
       </p:cxnSp>
       <p:sp>
         <p:nvSpPr>
-          <p:cNvPr id="231" name="card"/>
+          <p:cNvPr id="233" name="card"/>
           <p:cNvSpPr/>
           <p:nvPr/>
         </p:nvSpPr>
@@ -6524,7 +6701,7 @@
       </p:sp>
       <p:sp>
         <p:nvSpPr>
-          <p:cNvPr id="232" name="card"/>
+          <p:cNvPr id="234" name="card"/>
           <p:cNvSpPr/>
           <p:nvPr/>
         </p:nvSpPr>
@@ -6662,7 +6839,7 @@
       </p:sp>
       <p:sp>
         <p:nvSpPr>
-          <p:cNvPr id="233" name="card"/>
+          <p:cNvPr id="235" name="card"/>
           <p:cNvSpPr/>
           <p:nvPr/>
         </p:nvSpPr>
@@ -6724,7 +6901,7 @@
       </p:sp>
       <p:sp>
         <p:nvSpPr>
-          <p:cNvPr id="234" name="tb"/>
+          <p:cNvPr id="236" name="tb"/>
           <p:cNvSpPr txBox="1"/>
           <p:nvPr/>
         </p:nvSpPr>
@@ -6763,7 +6940,7 @@
       </p:sp>
       <p:sp>
         <p:nvSpPr>
-          <p:cNvPr id="235" name="tb"/>
+          <p:cNvPr id="237" name="tb"/>
           <p:cNvSpPr txBox="1"/>
           <p:nvPr/>
         </p:nvSpPr>
@@ -6827,7 +7004,7 @@
       </p:grpSpPr>
       <p:sp>
         <p:nvSpPr>
-          <p:cNvPr id="236" name="r"/>
+          <p:cNvPr id="238" name="r"/>
           <p:cNvSpPr/>
           <p:nvPr/>
         </p:nvSpPr>
@@ -6859,7 +7036,7 @@
       </p:sp>
       <p:sp>
         <p:nvSpPr>
-          <p:cNvPr id="237" name="tb"/>
+          <p:cNvPr id="239" name="tb"/>
           <p:cNvSpPr txBox="1"/>
           <p:nvPr/>
         </p:nvSpPr>
@@ -6898,7 +7075,7 @@
       </p:sp>
       <p:sp>
         <p:nvSpPr>
-          <p:cNvPr id="238" name="tb"/>
+          <p:cNvPr id="240" name="tb"/>
           <p:cNvSpPr txBox="1"/>
           <p:nvPr/>
         </p:nvSpPr>
@@ -6937,7 +7114,7 @@
       </p:sp>
       <p:cxnSp>
         <p:nvCxnSpPr>
-          <p:cNvPr id="239" name="ln"/>
+          <p:cNvPr id="241" name="ln"/>
           <p:cNvCxnSpPr/>
           <p:nvPr/>
         </p:nvCxnSpPr>
@@ -6958,7 +7135,7 @@
       </p:cxnSp>
       <p:sp>
         <p:nvSpPr>
-          <p:cNvPr id="240" name="card"/>
+          <p:cNvPr id="242" name="card"/>
           <p:cNvSpPr/>
           <p:nvPr/>
         </p:nvSpPr>
@@ -7011,7 +7188,7 @@
       </p:sp>
       <p:sp>
         <p:nvSpPr>
-          <p:cNvPr id="241" name="ar"/>
+          <p:cNvPr id="243" name="ar"/>
           <p:cNvSpPr/>
           <p:nvPr/>
         </p:nvSpPr>
@@ -7034,7 +7211,7 @@
       </p:sp>
       <p:sp>
         <p:nvSpPr>
-          <p:cNvPr id="242" name="card"/>
+          <p:cNvPr id="244" name="card"/>
           <p:cNvSpPr/>
           <p:nvPr/>
         </p:nvSpPr>
@@ -7087,7 +7264,7 @@
       </p:sp>
       <p:sp>
         <p:nvSpPr>
-          <p:cNvPr id="243" name="ar"/>
+          <p:cNvPr id="245" name="ar"/>
           <p:cNvSpPr/>
           <p:nvPr/>
         </p:nvSpPr>
@@ -7110,7 +7287,7 @@
       </p:sp>
       <p:sp>
         <p:nvSpPr>
-          <p:cNvPr id="244" name="card"/>
+          <p:cNvPr id="246" name="card"/>
           <p:cNvSpPr/>
           <p:nvPr/>
         </p:nvSpPr>
@@ -7163,7 +7340,7 @@
       </p:sp>
       <p:sp>
         <p:nvSpPr>
-          <p:cNvPr id="245" name="ar"/>
+          <p:cNvPr id="247" name="ar"/>
           <p:cNvSpPr/>
           <p:nvPr/>
         </p:nvSpPr>
@@ -7186,7 +7363,7 @@
       </p:sp>
       <p:sp>
         <p:nvSpPr>
-          <p:cNvPr id="246" name="card"/>
+          <p:cNvPr id="248" name="card"/>
           <p:cNvSpPr/>
           <p:nvPr/>
         </p:nvSpPr>
@@ -7239,7 +7416,7 @@
       </p:sp>
       <p:sp>
         <p:nvSpPr>
-          <p:cNvPr id="247" name="ar"/>
+          <p:cNvPr id="249" name="ar"/>
           <p:cNvSpPr/>
           <p:nvPr/>
         </p:nvSpPr>
@@ -7262,7 +7439,7 @@
       </p:sp>
       <p:sp>
         <p:nvSpPr>
-          <p:cNvPr id="248" name="card"/>
+          <p:cNvPr id="250" name="card"/>
           <p:cNvSpPr/>
           <p:nvPr/>
         </p:nvSpPr>
@@ -7315,7 +7492,7 @@
       </p:sp>
       <p:sp>
         <p:nvSpPr>
-          <p:cNvPr id="249" name="ar"/>
+          <p:cNvPr id="251" name="ar"/>
           <p:cNvSpPr/>
           <p:nvPr/>
         </p:nvSpPr>
@@ -7338,7 +7515,7 @@
       </p:sp>
       <p:sp>
         <p:nvSpPr>
-          <p:cNvPr id="250" name="card"/>
+          <p:cNvPr id="252" name="card"/>
           <p:cNvSpPr/>
           <p:nvPr/>
         </p:nvSpPr>
@@ -7391,7 +7568,7 @@
       </p:sp>
       <p:sp>
         <p:nvSpPr>
-          <p:cNvPr id="251" name="card"/>
+          <p:cNvPr id="253" name="card"/>
           <p:cNvSpPr/>
           <p:nvPr/>
         </p:nvSpPr>
@@ -7444,7 +7621,7 @@
       </p:sp>
       <p:sp>
         <p:nvSpPr>
-          <p:cNvPr id="252" name="ar"/>
+          <p:cNvPr id="254" name="ar"/>
           <p:cNvSpPr/>
           <p:nvPr/>
         </p:nvSpPr>
@@ -7467,7 +7644,7 @@
       </p:sp>
       <p:sp>
         <p:nvSpPr>
-          <p:cNvPr id="253" name="card"/>
+          <p:cNvPr id="255" name="card"/>
           <p:cNvSpPr/>
           <p:nvPr/>
         </p:nvSpPr>
@@ -7520,7 +7697,7 @@
       </p:sp>
       <p:sp>
         <p:nvSpPr>
-          <p:cNvPr id="254" name="ar"/>
+          <p:cNvPr id="256" name="ar"/>
           <p:cNvSpPr/>
           <p:nvPr/>
         </p:nvSpPr>
@@ -7543,7 +7720,7 @@
       </p:sp>
       <p:sp>
         <p:nvSpPr>
-          <p:cNvPr id="255" name="card"/>
+          <p:cNvPr id="257" name="card"/>
           <p:cNvSpPr/>
           <p:nvPr/>
         </p:nvSpPr>
@@ -7605,7 +7782,7 @@
       </p:sp>
       <p:sp>
         <p:nvSpPr>
-          <p:cNvPr id="256" name="tb"/>
+          <p:cNvPr id="258" name="tb"/>
           <p:cNvSpPr txBox="1"/>
           <p:nvPr/>
         </p:nvSpPr>
@@ -7644,7 +7821,7 @@
       </p:sp>
       <p:sp>
         <p:nvSpPr>
-          <p:cNvPr id="257" name="tb"/>
+          <p:cNvPr id="259" name="tb"/>
           <p:cNvSpPr txBox="1"/>
           <p:nvPr/>
         </p:nvSpPr>
@@ -7708,7 +7885,7 @@
       </p:grpSpPr>
       <p:sp>
         <p:nvSpPr>
-          <p:cNvPr id="258" name="r"/>
+          <p:cNvPr id="260" name="r"/>
           <p:cNvSpPr/>
           <p:nvPr/>
         </p:nvSpPr>
@@ -7740,7 +7917,7 @@
       </p:sp>
       <p:sp>
         <p:nvSpPr>
-          <p:cNvPr id="259" name="tb"/>
+          <p:cNvPr id="261" name="tb"/>
           <p:cNvSpPr txBox="1"/>
           <p:nvPr/>
         </p:nvSpPr>
@@ -7779,7 +7956,7 @@
       </p:sp>
       <p:sp>
         <p:nvSpPr>
-          <p:cNvPr id="260" name="tb"/>
+          <p:cNvPr id="262" name="tb"/>
           <p:cNvSpPr txBox="1"/>
           <p:nvPr/>
         </p:nvSpPr>
@@ -7818,7 +7995,7 @@
       </p:sp>
       <p:cxnSp>
         <p:nvCxnSpPr>
-          <p:cNvPr id="261" name="ln"/>
+          <p:cNvPr id="263" name="ln"/>
           <p:cNvCxnSpPr/>
           <p:nvPr/>
         </p:nvCxnSpPr>
@@ -7839,7 +8016,7 @@
       </p:cxnSp>
       <p:sp>
         <p:nvSpPr>
-          <p:cNvPr id="262" name="card"/>
+          <p:cNvPr id="264" name="card"/>
           <p:cNvSpPr/>
           <p:nvPr/>
         </p:nvSpPr>
@@ -7904,7 +8081,7 @@
       </p:sp>
       <p:sp>
         <p:nvSpPr>
-          <p:cNvPr id="263" name="card"/>
+          <p:cNvPr id="265" name="card"/>
           <p:cNvSpPr/>
           <p:nvPr/>
         </p:nvSpPr>
@@ -7969,7 +8146,7 @@
       </p:sp>
       <p:sp>
         <p:nvSpPr>
-          <p:cNvPr id="264" name="card"/>
+          <p:cNvPr id="266" name="card"/>
           <p:cNvSpPr/>
           <p:nvPr/>
         </p:nvSpPr>
@@ -8034,7 +8211,7 @@
       </p:sp>
       <p:sp>
         <p:nvSpPr>
-          <p:cNvPr id="265" name="card"/>
+          <p:cNvPr id="267" name="card"/>
           <p:cNvSpPr/>
           <p:nvPr/>
         </p:nvSpPr>
@@ -8099,7 +8276,7 @@
       </p:sp>
       <p:sp>
         <p:nvSpPr>
-          <p:cNvPr id="266" name="card"/>
+          <p:cNvPr id="268" name="card"/>
           <p:cNvSpPr/>
           <p:nvPr/>
         </p:nvSpPr>
@@ -8161,7 +8338,7 @@
       </p:sp>
       <p:sp>
         <p:nvSpPr>
-          <p:cNvPr id="267" name="tb"/>
+          <p:cNvPr id="269" name="tb"/>
           <p:cNvSpPr txBox="1"/>
           <p:nvPr/>
         </p:nvSpPr>
@@ -8200,7 +8377,7 @@
       </p:sp>
       <p:sp>
         <p:nvSpPr>
-          <p:cNvPr id="268" name="tb"/>
+          <p:cNvPr id="270" name="tb"/>
           <p:cNvSpPr txBox="1"/>
           <p:nvPr/>
         </p:nvSpPr>
@@ -8264,7 +8441,7 @@
       </p:grpSpPr>
       <p:sp>
         <p:nvSpPr>
-          <p:cNvPr id="11" name="r"/>
+          <p:cNvPr id="13" name="r"/>
           <p:cNvSpPr/>
           <p:nvPr/>
         </p:nvSpPr>
@@ -8296,7 +8473,7 @@
       </p:sp>
       <p:sp>
         <p:nvSpPr>
-          <p:cNvPr id="12" name="tb"/>
+          <p:cNvPr id="14" name="tb"/>
           <p:cNvSpPr txBox="1"/>
           <p:nvPr/>
         </p:nvSpPr>
@@ -8335,7 +8512,7 @@
       </p:sp>
       <p:sp>
         <p:nvSpPr>
-          <p:cNvPr id="13" name="tb"/>
+          <p:cNvPr id="15" name="tb"/>
           <p:cNvSpPr txBox="1"/>
           <p:nvPr/>
         </p:nvSpPr>
@@ -8374,7 +8551,7 @@
       </p:sp>
       <p:cxnSp>
         <p:nvCxnSpPr>
-          <p:cNvPr id="14" name="ln"/>
+          <p:cNvPr id="16" name="ln"/>
           <p:cNvCxnSpPr/>
           <p:nvPr/>
         </p:nvCxnSpPr>
@@ -8395,7 +8572,7 @@
       </p:cxnSp>
       <p:sp>
         <p:nvSpPr>
-          <p:cNvPr id="15" name="card"/>
+          <p:cNvPr id="17" name="card"/>
           <p:cNvSpPr/>
           <p:nvPr/>
         </p:nvSpPr>
@@ -8521,7 +8698,7 @@
       </p:sp>
       <p:sp>
         <p:nvSpPr>
-          <p:cNvPr id="16" name="card"/>
+          <p:cNvPr id="18" name="card"/>
           <p:cNvSpPr/>
           <p:nvPr/>
         </p:nvSpPr>
@@ -8569,7 +8746,7 @@
       </p:sp>
       <p:sp>
         <p:nvSpPr>
-          <p:cNvPr id="17" name="ar"/>
+          <p:cNvPr id="19" name="ar"/>
           <p:cNvSpPr/>
           <p:nvPr/>
         </p:nvSpPr>
@@ -8592,7 +8769,7 @@
       </p:sp>
       <p:sp>
         <p:nvSpPr>
-          <p:cNvPr id="18" name="card"/>
+          <p:cNvPr id="20" name="card"/>
           <p:cNvSpPr/>
           <p:nvPr/>
         </p:nvSpPr>
@@ -8640,7 +8817,7 @@
       </p:sp>
       <p:sp>
         <p:nvSpPr>
-          <p:cNvPr id="19" name="ar"/>
+          <p:cNvPr id="21" name="ar"/>
           <p:cNvSpPr/>
           <p:nvPr/>
         </p:nvSpPr>
@@ -8663,7 +8840,7 @@
       </p:sp>
       <p:sp>
         <p:nvSpPr>
-          <p:cNvPr id="20" name="card"/>
+          <p:cNvPr id="22" name="card"/>
           <p:cNvSpPr/>
           <p:nvPr/>
         </p:nvSpPr>
@@ -8711,7 +8888,7 @@
       </p:sp>
       <p:sp>
         <p:nvSpPr>
-          <p:cNvPr id="21" name="ar"/>
+          <p:cNvPr id="23" name="ar"/>
           <p:cNvSpPr/>
           <p:nvPr/>
         </p:nvSpPr>
@@ -8734,7 +8911,7 @@
       </p:sp>
       <p:sp>
         <p:nvSpPr>
-          <p:cNvPr id="22" name="card"/>
+          <p:cNvPr id="24" name="card"/>
           <p:cNvSpPr/>
           <p:nvPr/>
         </p:nvSpPr>
@@ -8782,7 +8959,7 @@
       </p:sp>
       <p:sp>
         <p:nvSpPr>
-          <p:cNvPr id="23" name="ar"/>
+          <p:cNvPr id="25" name="ar"/>
           <p:cNvSpPr/>
           <p:nvPr/>
         </p:nvSpPr>
@@ -8805,7 +8982,7 @@
       </p:sp>
       <p:sp>
         <p:nvSpPr>
-          <p:cNvPr id="24" name="card"/>
+          <p:cNvPr id="26" name="card"/>
           <p:cNvSpPr/>
           <p:nvPr/>
         </p:nvSpPr>
@@ -8853,7 +9030,7 @@
       </p:sp>
       <p:sp>
         <p:nvSpPr>
-          <p:cNvPr id="25" name="card"/>
+          <p:cNvPr id="27" name="card"/>
           <p:cNvSpPr/>
           <p:nvPr/>
         </p:nvSpPr>
@@ -8915,7 +9092,7 @@
       </p:sp>
       <p:sp>
         <p:nvSpPr>
-          <p:cNvPr id="26" name="tb"/>
+          <p:cNvPr id="28" name="tb"/>
           <p:cNvSpPr txBox="1"/>
           <p:nvPr/>
         </p:nvSpPr>
@@ -8954,7 +9131,7 @@
       </p:sp>
       <p:sp>
         <p:nvSpPr>
-          <p:cNvPr id="27" name="tb"/>
+          <p:cNvPr id="29" name="tb"/>
           <p:cNvSpPr txBox="1"/>
           <p:nvPr/>
         </p:nvSpPr>
@@ -9018,7 +9195,7 @@
       </p:grpSpPr>
       <p:sp>
         <p:nvSpPr>
-          <p:cNvPr id="269" name="r"/>
+          <p:cNvPr id="271" name="r"/>
           <p:cNvSpPr/>
           <p:nvPr/>
         </p:nvSpPr>
@@ -9050,7 +9227,7 @@
       </p:sp>
       <p:sp>
         <p:nvSpPr>
-          <p:cNvPr id="270" name="tb"/>
+          <p:cNvPr id="272" name="tb"/>
           <p:cNvSpPr txBox="1"/>
           <p:nvPr/>
         </p:nvSpPr>
@@ -9089,7 +9266,7 @@
       </p:sp>
       <p:sp>
         <p:nvSpPr>
-          <p:cNvPr id="271" name="tb"/>
+          <p:cNvPr id="273" name="tb"/>
           <p:cNvSpPr txBox="1"/>
           <p:nvPr/>
         </p:nvSpPr>
@@ -9128,7 +9305,7 @@
       </p:sp>
       <p:cxnSp>
         <p:nvCxnSpPr>
-          <p:cNvPr id="272" name="ln"/>
+          <p:cNvPr id="274" name="ln"/>
           <p:cNvCxnSpPr/>
           <p:nvPr/>
         </p:nvCxnSpPr>
@@ -9149,7 +9326,7 @@
       </p:cxnSp>
       <p:sp>
         <p:nvSpPr>
-          <p:cNvPr id="273" name="card"/>
+          <p:cNvPr id="275" name="card"/>
           <p:cNvSpPr/>
           <p:nvPr/>
         </p:nvSpPr>
@@ -9287,7 +9464,7 @@
       </p:sp>
       <p:sp>
         <p:nvSpPr>
-          <p:cNvPr id="274" name="card"/>
+          <p:cNvPr id="276" name="card"/>
           <p:cNvSpPr/>
           <p:nvPr/>
         </p:nvSpPr>
@@ -9443,7 +9620,7 @@
       </p:sp>
       <p:sp>
         <p:nvSpPr>
-          <p:cNvPr id="275" name="tb"/>
+          <p:cNvPr id="277" name="tb"/>
           <p:cNvSpPr txBox="1"/>
           <p:nvPr/>
         </p:nvSpPr>
@@ -9482,7 +9659,7 @@
       </p:sp>
       <p:sp>
         <p:nvSpPr>
-          <p:cNvPr id="276" name="tb"/>
+          <p:cNvPr id="278" name="tb"/>
           <p:cNvSpPr txBox="1"/>
           <p:nvPr/>
         </p:nvSpPr>
@@ -9546,7 +9723,7 @@
       </p:grpSpPr>
       <p:sp>
         <p:nvSpPr>
-          <p:cNvPr id="277" name="r"/>
+          <p:cNvPr id="279" name="r"/>
           <p:cNvSpPr/>
           <p:nvPr/>
         </p:nvSpPr>
@@ -9578,7 +9755,7 @@
       </p:sp>
       <p:sp>
         <p:nvSpPr>
-          <p:cNvPr id="278" name="tb"/>
+          <p:cNvPr id="280" name="tb"/>
           <p:cNvSpPr txBox="1"/>
           <p:nvPr/>
         </p:nvSpPr>
@@ -9617,7 +9794,7 @@
       </p:sp>
       <p:sp>
         <p:nvSpPr>
-          <p:cNvPr id="279" name="tb"/>
+          <p:cNvPr id="281" name="tb"/>
           <p:cNvSpPr txBox="1"/>
           <p:nvPr/>
         </p:nvSpPr>
@@ -9656,7 +9833,7 @@
       </p:sp>
       <p:cxnSp>
         <p:nvCxnSpPr>
-          <p:cNvPr id="280" name="ln"/>
+          <p:cNvPr id="282" name="ln"/>
           <p:cNvCxnSpPr/>
           <p:nvPr/>
         </p:nvCxnSpPr>
@@ -9677,7 +9854,7 @@
       </p:cxnSp>
       <p:sp>
         <p:nvSpPr>
-          <p:cNvPr id="281" name="r"/>
+          <p:cNvPr id="283" name="r"/>
           <p:cNvSpPr/>
           <p:nvPr/>
         </p:nvSpPr>
@@ -9721,7 +9898,7 @@
       </p:sp>
       <p:sp>
         <p:nvSpPr>
-          <p:cNvPr id="282" name="r"/>
+          <p:cNvPr id="284" name="r"/>
           <p:cNvSpPr/>
           <p:nvPr/>
         </p:nvSpPr>
@@ -9765,7 +9942,7 @@
       </p:sp>
       <p:sp>
         <p:nvSpPr>
-          <p:cNvPr id="283" name="r"/>
+          <p:cNvPr id="285" name="r"/>
           <p:cNvSpPr/>
           <p:nvPr/>
         </p:nvSpPr>
@@ -9809,7 +9986,7 @@
       </p:sp>
       <p:sp>
         <p:nvSpPr>
-          <p:cNvPr id="284" name="r"/>
+          <p:cNvPr id="286" name="r"/>
           <p:cNvSpPr/>
           <p:nvPr/>
         </p:nvSpPr>
@@ -9855,7 +10032,7 @@
       </p:sp>
       <p:sp>
         <p:nvSpPr>
-          <p:cNvPr id="285" name="r"/>
+          <p:cNvPr id="287" name="r"/>
           <p:cNvSpPr/>
           <p:nvPr/>
         </p:nvSpPr>
@@ -9901,7 +10078,7 @@
       </p:sp>
       <p:sp>
         <p:nvSpPr>
-          <p:cNvPr id="286" name="r"/>
+          <p:cNvPr id="288" name="r"/>
           <p:cNvSpPr/>
           <p:nvPr/>
         </p:nvSpPr>
@@ -9947,7 +10124,7 @@
       </p:sp>
       <p:sp>
         <p:nvSpPr>
-          <p:cNvPr id="287" name="r"/>
+          <p:cNvPr id="289" name="r"/>
           <p:cNvSpPr/>
           <p:nvPr/>
         </p:nvSpPr>
@@ -9993,7 +10170,7 @@
       </p:sp>
       <p:sp>
         <p:nvSpPr>
-          <p:cNvPr id="288" name="r"/>
+          <p:cNvPr id="290" name="r"/>
           <p:cNvSpPr/>
           <p:nvPr/>
         </p:nvSpPr>
@@ -10039,7 +10216,7 @@
       </p:sp>
       <p:sp>
         <p:nvSpPr>
-          <p:cNvPr id="289" name="r"/>
+          <p:cNvPr id="291" name="r"/>
           <p:cNvSpPr/>
           <p:nvPr/>
         </p:nvSpPr>
@@ -10085,7 +10262,7 @@
       </p:sp>
       <p:sp>
         <p:nvSpPr>
-          <p:cNvPr id="290" name="r"/>
+          <p:cNvPr id="292" name="r"/>
           <p:cNvSpPr/>
           <p:nvPr/>
         </p:nvSpPr>
@@ -10131,7 +10308,7 @@
       </p:sp>
       <p:sp>
         <p:nvSpPr>
-          <p:cNvPr id="291" name="r"/>
+          <p:cNvPr id="293" name="r"/>
           <p:cNvSpPr/>
           <p:nvPr/>
         </p:nvSpPr>
@@ -10177,7 +10354,7 @@
       </p:sp>
       <p:sp>
         <p:nvSpPr>
-          <p:cNvPr id="292" name="r"/>
+          <p:cNvPr id="294" name="r"/>
           <p:cNvSpPr/>
           <p:nvPr/>
         </p:nvSpPr>
@@ -10223,7 +10400,7 @@
       </p:sp>
       <p:sp>
         <p:nvSpPr>
-          <p:cNvPr id="293" name="r"/>
+          <p:cNvPr id="295" name="r"/>
           <p:cNvSpPr/>
           <p:nvPr/>
         </p:nvSpPr>
@@ -10269,7 +10446,7 @@
       </p:sp>
       <p:sp>
         <p:nvSpPr>
-          <p:cNvPr id="294" name="r"/>
+          <p:cNvPr id="296" name="r"/>
           <p:cNvSpPr/>
           <p:nvPr/>
         </p:nvSpPr>
@@ -10315,7 +10492,7 @@
       </p:sp>
       <p:sp>
         <p:nvSpPr>
-          <p:cNvPr id="295" name="r"/>
+          <p:cNvPr id="297" name="r"/>
           <p:cNvSpPr/>
           <p:nvPr/>
         </p:nvSpPr>
@@ -10361,7 +10538,7 @@
       </p:sp>
       <p:sp>
         <p:nvSpPr>
-          <p:cNvPr id="296" name="card"/>
+          <p:cNvPr id="298" name="card"/>
           <p:cNvSpPr/>
           <p:nvPr/>
         </p:nvSpPr>
@@ -10423,7 +10600,7 @@
       </p:sp>
       <p:sp>
         <p:nvSpPr>
-          <p:cNvPr id="297" name="tb"/>
+          <p:cNvPr id="299" name="tb"/>
           <p:cNvSpPr txBox="1"/>
           <p:nvPr/>
         </p:nvSpPr>
@@ -10462,7 +10639,7 @@
       </p:sp>
       <p:sp>
         <p:nvSpPr>
-          <p:cNvPr id="298" name="tb"/>
+          <p:cNvPr id="300" name="tb"/>
           <p:cNvSpPr txBox="1"/>
           <p:nvPr/>
         </p:nvSpPr>
@@ -10526,7 +10703,7 @@
       </p:grpSpPr>
       <p:sp>
         <p:nvSpPr>
-          <p:cNvPr id="299" name="r"/>
+          <p:cNvPr id="301" name="r"/>
           <p:cNvSpPr/>
           <p:nvPr/>
         </p:nvSpPr>
@@ -10558,7 +10735,7 @@
       </p:sp>
       <p:sp>
         <p:nvSpPr>
-          <p:cNvPr id="300" name="tb"/>
+          <p:cNvPr id="302" name="tb"/>
           <p:cNvSpPr txBox="1"/>
           <p:nvPr/>
         </p:nvSpPr>
@@ -10597,7 +10774,7 @@
       </p:sp>
       <p:sp>
         <p:nvSpPr>
-          <p:cNvPr id="301" name="tb"/>
+          <p:cNvPr id="303" name="tb"/>
           <p:cNvSpPr txBox="1"/>
           <p:nvPr/>
         </p:nvSpPr>
@@ -10636,7 +10813,7 @@
       </p:sp>
       <p:cxnSp>
         <p:nvCxnSpPr>
-          <p:cNvPr id="302" name="ln"/>
+          <p:cNvPr id="304" name="ln"/>
           <p:cNvCxnSpPr/>
           <p:nvPr/>
         </p:nvCxnSpPr>
@@ -10657,7 +10834,7 @@
       </p:cxnSp>
       <p:sp>
         <p:nvSpPr>
-          <p:cNvPr id="303" name="card"/>
+          <p:cNvPr id="305" name="card"/>
           <p:cNvSpPr/>
           <p:nvPr/>
         </p:nvSpPr>
@@ -10777,7 +10954,7 @@
       </p:sp>
       <p:sp>
         <p:nvSpPr>
-          <p:cNvPr id="304" name="card"/>
+          <p:cNvPr id="306" name="card"/>
           <p:cNvSpPr/>
           <p:nvPr/>
         </p:nvSpPr>
@@ -10915,7 +11092,7 @@
       </p:sp>
       <p:sp>
         <p:nvSpPr>
-          <p:cNvPr id="305" name="tb"/>
+          <p:cNvPr id="307" name="tb"/>
           <p:cNvSpPr txBox="1"/>
           <p:nvPr/>
         </p:nvSpPr>
@@ -10954,7 +11131,7 @@
       </p:sp>
       <p:sp>
         <p:nvSpPr>
-          <p:cNvPr id="306" name="tb"/>
+          <p:cNvPr id="308" name="tb"/>
           <p:cNvSpPr txBox="1"/>
           <p:nvPr/>
         </p:nvSpPr>
@@ -11018,7 +11195,7 @@
       </p:grpSpPr>
       <p:sp>
         <p:nvSpPr>
-          <p:cNvPr id="307" name="r"/>
+          <p:cNvPr id="309" name="r"/>
           <p:cNvSpPr/>
           <p:nvPr/>
         </p:nvSpPr>
@@ -11050,7 +11227,7 @@
       </p:sp>
       <p:sp>
         <p:nvSpPr>
-          <p:cNvPr id="308" name="tb"/>
+          <p:cNvPr id="310" name="tb"/>
           <p:cNvSpPr txBox="1"/>
           <p:nvPr/>
         </p:nvSpPr>
@@ -11089,7 +11266,7 @@
       </p:sp>
       <p:sp>
         <p:nvSpPr>
-          <p:cNvPr id="309" name="tb"/>
+          <p:cNvPr id="311" name="tb"/>
           <p:cNvSpPr txBox="1"/>
           <p:nvPr/>
         </p:nvSpPr>
@@ -11128,7 +11305,7 @@
       </p:sp>
       <p:cxnSp>
         <p:nvCxnSpPr>
-          <p:cNvPr id="310" name="ln"/>
+          <p:cNvPr id="312" name="ln"/>
           <p:cNvCxnSpPr/>
           <p:nvPr/>
         </p:nvCxnSpPr>
@@ -11149,7 +11326,7 @@
       </p:cxnSp>
       <p:sp>
         <p:nvSpPr>
-          <p:cNvPr id="311" name="tb"/>
+          <p:cNvPr id="313" name="tb"/>
           <p:cNvSpPr txBox="1"/>
           <p:nvPr/>
         </p:nvSpPr>
@@ -11188,7 +11365,7 @@
       </p:sp>
       <p:sp>
         <p:nvSpPr>
-          <p:cNvPr id="312" name="tb"/>
+          <p:cNvPr id="314" name="tb"/>
           <p:cNvSpPr txBox="1"/>
           <p:nvPr/>
         </p:nvSpPr>
@@ -11227,7 +11404,7 @@
       </p:sp>
       <p:sp>
         <p:nvSpPr>
-          <p:cNvPr id="313" name="tb"/>
+          <p:cNvPr id="315" name="tb"/>
           <p:cNvSpPr txBox="1"/>
           <p:nvPr/>
         </p:nvSpPr>
@@ -11266,7 +11443,7 @@
       </p:sp>
       <p:sp>
         <p:nvSpPr>
-          <p:cNvPr id="314" name="tb"/>
+          <p:cNvPr id="316" name="tb"/>
           <p:cNvSpPr txBox="1"/>
           <p:nvPr/>
         </p:nvSpPr>
@@ -11305,7 +11482,7 @@
       </p:sp>
       <p:sp>
         <p:nvSpPr>
-          <p:cNvPr id="315" name="tb"/>
+          <p:cNvPr id="317" name="tb"/>
           <p:cNvSpPr txBox="1"/>
           <p:nvPr/>
         </p:nvSpPr>
@@ -11344,7 +11521,7 @@
       </p:sp>
       <p:sp>
         <p:nvSpPr>
-          <p:cNvPr id="316" name="tb"/>
+          <p:cNvPr id="318" name="tb"/>
           <p:cNvSpPr txBox="1"/>
           <p:nvPr/>
         </p:nvSpPr>
@@ -11383,7 +11560,7 @@
       </p:sp>
       <p:sp>
         <p:nvSpPr>
-          <p:cNvPr id="317" name="tb"/>
+          <p:cNvPr id="319" name="tb"/>
           <p:cNvSpPr txBox="1"/>
           <p:nvPr/>
         </p:nvSpPr>
@@ -11422,7 +11599,7 @@
       </p:sp>
       <p:sp>
         <p:nvSpPr>
-          <p:cNvPr id="318" name="tb"/>
+          <p:cNvPr id="320" name="tb"/>
           <p:cNvSpPr txBox="1"/>
           <p:nvPr/>
         </p:nvSpPr>
@@ -11461,7 +11638,7 @@
       </p:sp>
       <p:sp>
         <p:nvSpPr>
-          <p:cNvPr id="319" name="tb"/>
+          <p:cNvPr id="321" name="tb"/>
           <p:cNvSpPr txBox="1"/>
           <p:nvPr/>
         </p:nvSpPr>
@@ -11500,7 +11677,7 @@
       </p:sp>
       <p:sp>
         <p:nvSpPr>
-          <p:cNvPr id="320" name="tb"/>
+          <p:cNvPr id="322" name="tb"/>
           <p:cNvSpPr txBox="1"/>
           <p:nvPr/>
         </p:nvSpPr>
@@ -11539,7 +11716,7 @@
       </p:sp>
       <p:sp>
         <p:nvSpPr>
-          <p:cNvPr id="321" name="o"/>
+          <p:cNvPr id="323" name="o"/>
           <p:cNvSpPr/>
           <p:nvPr/>
         </p:nvSpPr>
@@ -11573,7 +11750,7 @@
       </p:sp>
       <p:sp>
         <p:nvSpPr>
-          <p:cNvPr id="322" name="o"/>
+          <p:cNvPr id="324" name="o"/>
           <p:cNvSpPr/>
           <p:nvPr/>
         </p:nvSpPr>
@@ -11607,7 +11784,7 @@
       </p:sp>
       <p:sp>
         <p:nvSpPr>
-          <p:cNvPr id="323" name="o"/>
+          <p:cNvPr id="325" name="o"/>
           <p:cNvSpPr/>
           <p:nvPr/>
         </p:nvSpPr>
@@ -11641,7 +11818,7 @@
       </p:sp>
       <p:sp>
         <p:nvSpPr>
-          <p:cNvPr id="324" name="o"/>
+          <p:cNvPr id="326" name="o"/>
           <p:cNvSpPr/>
           <p:nvPr/>
         </p:nvSpPr>
@@ -11675,7 +11852,7 @@
       </p:sp>
       <p:sp>
         <p:nvSpPr>
-          <p:cNvPr id="325" name="o"/>
+          <p:cNvPr id="327" name="o"/>
           <p:cNvSpPr/>
           <p:nvPr/>
         </p:nvSpPr>
@@ -11709,7 +11886,7 @@
       </p:sp>
       <p:sp>
         <p:nvSpPr>
-          <p:cNvPr id="326" name="o"/>
+          <p:cNvPr id="328" name="o"/>
           <p:cNvSpPr/>
           <p:nvPr/>
         </p:nvSpPr>
@@ -11743,7 +11920,7 @@
       </p:sp>
       <p:sp>
         <p:nvSpPr>
-          <p:cNvPr id="327" name="o"/>
+          <p:cNvPr id="329" name="o"/>
           <p:cNvSpPr/>
           <p:nvPr/>
         </p:nvSpPr>
@@ -11777,7 +11954,7 @@
       </p:sp>
       <p:sp>
         <p:nvSpPr>
-          <p:cNvPr id="328" name="o"/>
+          <p:cNvPr id="330" name="o"/>
           <p:cNvSpPr/>
           <p:nvPr/>
         </p:nvSpPr>
@@ -11811,7 +11988,7 @@
       </p:sp>
       <p:sp>
         <p:nvSpPr>
-          <p:cNvPr id="329" name="o"/>
+          <p:cNvPr id="331" name="o"/>
           <p:cNvSpPr/>
           <p:nvPr/>
         </p:nvSpPr>
@@ -11845,7 +12022,7 @@
       </p:sp>
       <p:sp>
         <p:nvSpPr>
-          <p:cNvPr id="330" name="o"/>
+          <p:cNvPr id="332" name="o"/>
           <p:cNvSpPr/>
           <p:nvPr/>
         </p:nvSpPr>
@@ -11879,7 +12056,7 @@
       </p:sp>
       <p:sp>
         <p:nvSpPr>
-          <p:cNvPr id="331" name="o"/>
+          <p:cNvPr id="333" name="o"/>
           <p:cNvSpPr/>
           <p:nvPr/>
         </p:nvSpPr>
@@ -11913,7 +12090,7 @@
       </p:sp>
       <p:sp>
         <p:nvSpPr>
-          <p:cNvPr id="332" name="o"/>
+          <p:cNvPr id="334" name="o"/>
           <p:cNvSpPr/>
           <p:nvPr/>
         </p:nvSpPr>
@@ -11947,7 +12124,7 @@
       </p:sp>
       <p:sp>
         <p:nvSpPr>
-          <p:cNvPr id="333" name="o"/>
+          <p:cNvPr id="335" name="o"/>
           <p:cNvSpPr/>
           <p:nvPr/>
         </p:nvSpPr>
@@ -11981,7 +12158,7 @@
       </p:sp>
       <p:sp>
         <p:nvSpPr>
-          <p:cNvPr id="334" name="o"/>
+          <p:cNvPr id="336" name="o"/>
           <p:cNvSpPr/>
           <p:nvPr/>
         </p:nvSpPr>
@@ -12015,7 +12192,7 @@
       </p:sp>
       <p:sp>
         <p:nvSpPr>
-          <p:cNvPr id="335" name="o"/>
+          <p:cNvPr id="337" name="o"/>
           <p:cNvSpPr/>
           <p:nvPr/>
         </p:nvSpPr>
@@ -12049,7 +12226,7 @@
       </p:sp>
       <p:sp>
         <p:nvSpPr>
-          <p:cNvPr id="336" name="o"/>
+          <p:cNvPr id="338" name="o"/>
           <p:cNvSpPr/>
           <p:nvPr/>
         </p:nvSpPr>
@@ -12083,7 +12260,7 @@
       </p:sp>
       <p:sp>
         <p:nvSpPr>
-          <p:cNvPr id="337" name="o"/>
+          <p:cNvPr id="339" name="o"/>
           <p:cNvSpPr/>
           <p:nvPr/>
         </p:nvSpPr>
@@ -12117,7 +12294,7 @@
       </p:sp>
       <p:sp>
         <p:nvSpPr>
-          <p:cNvPr id="338" name="o"/>
+          <p:cNvPr id="340" name="o"/>
           <p:cNvSpPr/>
           <p:nvPr/>
         </p:nvSpPr>
@@ -12151,7 +12328,7 @@
       </p:sp>
       <p:sp>
         <p:nvSpPr>
-          <p:cNvPr id="339" name="o"/>
+          <p:cNvPr id="341" name="o"/>
           <p:cNvSpPr/>
           <p:nvPr/>
         </p:nvSpPr>
@@ -12185,7 +12362,7 @@
       </p:sp>
       <p:sp>
         <p:nvSpPr>
-          <p:cNvPr id="340" name="o"/>
+          <p:cNvPr id="342" name="o"/>
           <p:cNvSpPr/>
           <p:nvPr/>
         </p:nvSpPr>
@@ -12219,7 +12396,7 @@
       </p:sp>
       <p:sp>
         <p:nvSpPr>
-          <p:cNvPr id="341" name="o"/>
+          <p:cNvPr id="343" name="o"/>
           <p:cNvSpPr/>
           <p:nvPr/>
         </p:nvSpPr>
@@ -12253,7 +12430,7 @@
       </p:sp>
       <p:sp>
         <p:nvSpPr>
-          <p:cNvPr id="342" name="o"/>
+          <p:cNvPr id="344" name="o"/>
           <p:cNvSpPr/>
           <p:nvPr/>
         </p:nvSpPr>
@@ -12287,7 +12464,7 @@
       </p:sp>
       <p:sp>
         <p:nvSpPr>
-          <p:cNvPr id="343" name="o"/>
+          <p:cNvPr id="345" name="o"/>
           <p:cNvSpPr/>
           <p:nvPr/>
         </p:nvSpPr>
@@ -12321,7 +12498,7 @@
       </p:sp>
       <p:sp>
         <p:nvSpPr>
-          <p:cNvPr id="344" name="o"/>
+          <p:cNvPr id="346" name="o"/>
           <p:cNvSpPr/>
           <p:nvPr/>
         </p:nvSpPr>
@@ -12355,7 +12532,7 @@
       </p:sp>
       <p:sp>
         <p:nvSpPr>
-          <p:cNvPr id="345" name="o"/>
+          <p:cNvPr id="347" name="o"/>
           <p:cNvSpPr/>
           <p:nvPr/>
         </p:nvSpPr>
@@ -12389,7 +12566,7 @@
       </p:sp>
       <p:sp>
         <p:nvSpPr>
-          <p:cNvPr id="346" name="tb"/>
+          <p:cNvPr id="348" name="tb"/>
           <p:cNvSpPr txBox="1"/>
           <p:nvPr/>
         </p:nvSpPr>
@@ -12428,7 +12605,7 @@
       </p:sp>
       <p:sp>
         <p:nvSpPr>
-          <p:cNvPr id="347" name="o"/>
+          <p:cNvPr id="349" name="o"/>
           <p:cNvSpPr/>
           <p:nvPr/>
         </p:nvSpPr>
@@ -12462,7 +12639,7 @@
       </p:sp>
       <p:sp>
         <p:nvSpPr>
-          <p:cNvPr id="348" name="tb"/>
+          <p:cNvPr id="350" name="tb"/>
           <p:cNvSpPr txBox="1"/>
           <p:nvPr/>
         </p:nvSpPr>
@@ -12501,7 +12678,7 @@
       </p:sp>
       <p:sp>
         <p:nvSpPr>
-          <p:cNvPr id="349" name="o"/>
+          <p:cNvPr id="351" name="o"/>
           <p:cNvSpPr/>
           <p:nvPr/>
         </p:nvSpPr>
@@ -12535,7 +12712,7 @@
       </p:sp>
       <p:sp>
         <p:nvSpPr>
-          <p:cNvPr id="350" name="tb"/>
+          <p:cNvPr id="352" name="tb"/>
           <p:cNvSpPr txBox="1"/>
           <p:nvPr/>
         </p:nvSpPr>
@@ -12574,7 +12751,7 @@
       </p:sp>
       <p:sp>
         <p:nvSpPr>
-          <p:cNvPr id="351" name="card"/>
+          <p:cNvPr id="353" name="card"/>
           <p:cNvSpPr/>
           <p:nvPr/>
         </p:nvSpPr>
@@ -12636,7 +12813,7 @@
       </p:sp>
       <p:sp>
         <p:nvSpPr>
-          <p:cNvPr id="352" name="tb"/>
+          <p:cNvPr id="354" name="tb"/>
           <p:cNvSpPr txBox="1"/>
           <p:nvPr/>
         </p:nvSpPr>
@@ -12675,7 +12852,7 @@
       </p:sp>
       <p:sp>
         <p:nvSpPr>
-          <p:cNvPr id="353" name="tb"/>
+          <p:cNvPr id="355" name="tb"/>
           <p:cNvSpPr txBox="1"/>
           <p:nvPr/>
         </p:nvSpPr>
@@ -12739,7 +12916,7 @@
       </p:grpSpPr>
       <p:sp>
         <p:nvSpPr>
-          <p:cNvPr id="354" name="r"/>
+          <p:cNvPr id="356" name="r"/>
           <p:cNvSpPr/>
           <p:nvPr/>
         </p:nvSpPr>
@@ -12771,7 +12948,7 @@
       </p:sp>
       <p:sp>
         <p:nvSpPr>
-          <p:cNvPr id="355" name="tb"/>
+          <p:cNvPr id="357" name="tb"/>
           <p:cNvSpPr txBox="1"/>
           <p:nvPr/>
         </p:nvSpPr>
@@ -12810,7 +12987,7 @@
       </p:sp>
       <p:sp>
         <p:nvSpPr>
-          <p:cNvPr id="356" name="tb"/>
+          <p:cNvPr id="358" name="tb"/>
           <p:cNvSpPr txBox="1"/>
           <p:nvPr/>
         </p:nvSpPr>
@@ -12849,7 +13026,7 @@
       </p:sp>
       <p:cxnSp>
         <p:nvCxnSpPr>
-          <p:cNvPr id="357" name="ln"/>
+          <p:cNvPr id="359" name="ln"/>
           <p:cNvCxnSpPr/>
           <p:nvPr/>
         </p:nvCxnSpPr>
@@ -12870,7 +13047,7 @@
       </p:cxnSp>
       <p:sp>
         <p:nvSpPr>
-          <p:cNvPr id="358" name="card"/>
+          <p:cNvPr id="360" name="card"/>
           <p:cNvSpPr/>
           <p:nvPr/>
         </p:nvSpPr>
@@ -12990,7 +13167,7 @@
       </p:sp>
       <p:sp>
         <p:nvSpPr>
-          <p:cNvPr id="359" name="card"/>
+          <p:cNvPr id="361" name="card"/>
           <p:cNvSpPr/>
           <p:nvPr/>
         </p:nvSpPr>
@@ -13077,7 +13254,7 @@
       </p:sp>
       <p:sp>
         <p:nvSpPr>
-          <p:cNvPr id="360" name="card"/>
+          <p:cNvPr id="362" name="card"/>
           <p:cNvSpPr/>
           <p:nvPr/>
         </p:nvSpPr>
@@ -13139,7 +13316,7 @@
       </p:sp>
       <p:sp>
         <p:nvSpPr>
-          <p:cNvPr id="361" name="tb"/>
+          <p:cNvPr id="363" name="tb"/>
           <p:cNvSpPr txBox="1"/>
           <p:nvPr/>
         </p:nvSpPr>
@@ -13178,7 +13355,7 @@
       </p:sp>
       <p:sp>
         <p:nvSpPr>
-          <p:cNvPr id="362" name="tb"/>
+          <p:cNvPr id="364" name="tb"/>
           <p:cNvSpPr txBox="1"/>
           <p:nvPr/>
         </p:nvSpPr>
@@ -13242,7 +13419,7 @@
       </p:grpSpPr>
       <p:sp>
         <p:nvSpPr>
-          <p:cNvPr id="363" name="r"/>
+          <p:cNvPr id="365" name="r"/>
           <p:cNvSpPr/>
           <p:nvPr/>
         </p:nvSpPr>
@@ -13274,7 +13451,7 @@
       </p:sp>
       <p:sp>
         <p:nvSpPr>
-          <p:cNvPr id="364" name="tb"/>
+          <p:cNvPr id="366" name="tb"/>
           <p:cNvSpPr txBox="1"/>
           <p:nvPr/>
         </p:nvSpPr>
@@ -13313,7 +13490,7 @@
       </p:sp>
       <p:sp>
         <p:nvSpPr>
-          <p:cNvPr id="365" name="tb"/>
+          <p:cNvPr id="367" name="tb"/>
           <p:cNvSpPr txBox="1"/>
           <p:nvPr/>
         </p:nvSpPr>
@@ -13352,7 +13529,7 @@
       </p:sp>
       <p:cxnSp>
         <p:nvCxnSpPr>
-          <p:cNvPr id="366" name="ln"/>
+          <p:cNvPr id="368" name="ln"/>
           <p:cNvCxnSpPr/>
           <p:nvPr/>
         </p:nvCxnSpPr>
@@ -13373,7 +13550,7 @@
       </p:cxnSp>
       <p:cxnSp>
         <p:nvCxnSpPr>
-          <p:cNvPr id="367" name="ln"/>
+          <p:cNvPr id="369" name="ln"/>
           <p:cNvCxnSpPr/>
           <p:nvPr/>
         </p:nvCxnSpPr>
@@ -13394,7 +13571,7 @@
       </p:cxnSp>
       <p:cxnSp>
         <p:nvCxnSpPr>
-          <p:cNvPr id="368" name="ln"/>
+          <p:cNvPr id="370" name="ln"/>
           <p:cNvCxnSpPr/>
           <p:nvPr/>
         </p:nvCxnSpPr>
@@ -13415,7 +13592,7 @@
       </p:cxnSp>
       <p:sp>
         <p:nvSpPr>
-          <p:cNvPr id="369" name="tb"/>
+          <p:cNvPr id="371" name="tb"/>
           <p:cNvSpPr txBox="1"/>
           <p:nvPr/>
         </p:nvSpPr>
@@ -13454,7 +13631,7 @@
       </p:sp>
       <p:sp>
         <p:nvSpPr>
-          <p:cNvPr id="370" name="tb"/>
+          <p:cNvPr id="372" name="tb"/>
           <p:cNvSpPr txBox="1"/>
           <p:nvPr/>
         </p:nvSpPr>
@@ -13493,7 +13670,7 @@
       </p:sp>
       <p:sp>
         <p:nvSpPr>
-          <p:cNvPr id="371" name="tb"/>
+          <p:cNvPr id="373" name="tb"/>
           <p:cNvSpPr txBox="1"/>
           <p:nvPr/>
         </p:nvSpPr>
@@ -13532,7 +13709,7 @@
       </p:sp>
       <p:cxnSp>
         <p:nvCxnSpPr>
-          <p:cNvPr id="372" name="ln"/>
+          <p:cNvPr id="374" name="ln"/>
           <p:cNvCxnSpPr/>
           <p:nvPr/>
         </p:nvCxnSpPr>
@@ -13553,7 +13730,7 @@
       </p:cxnSp>
       <p:sp>
         <p:nvSpPr>
-          <p:cNvPr id="373" name="r"/>
+          <p:cNvPr id="375" name="r"/>
           <p:cNvSpPr/>
           <p:nvPr/>
         </p:nvSpPr>
@@ -13585,7 +13762,7 @@
       </p:sp>
       <p:sp>
         <p:nvSpPr>
-          <p:cNvPr id="374" name="tb"/>
+          <p:cNvPr id="376" name="tb"/>
           <p:cNvSpPr txBox="1"/>
           <p:nvPr/>
         </p:nvSpPr>
@@ -13624,7 +13801,7 @@
       </p:sp>
       <p:sp>
         <p:nvSpPr>
-          <p:cNvPr id="375" name="card"/>
+          <p:cNvPr id="377" name="card"/>
           <p:cNvSpPr/>
           <p:nvPr/>
         </p:nvSpPr>
@@ -13686,7 +13863,7 @@
       </p:sp>
       <p:sp>
         <p:nvSpPr>
-          <p:cNvPr id="376" name="tb"/>
+          <p:cNvPr id="378" name="tb"/>
           <p:cNvSpPr txBox="1"/>
           <p:nvPr/>
         </p:nvSpPr>
@@ -13725,7 +13902,7 @@
       </p:sp>
       <p:sp>
         <p:nvSpPr>
-          <p:cNvPr id="377" name="tb"/>
+          <p:cNvPr id="379" name="tb"/>
           <p:cNvSpPr txBox="1"/>
           <p:nvPr/>
         </p:nvSpPr>
@@ -13789,7 +13966,7 @@
       </p:grpSpPr>
       <p:sp>
         <p:nvSpPr>
-          <p:cNvPr id="378" name="r"/>
+          <p:cNvPr id="380" name="r"/>
           <p:cNvSpPr/>
           <p:nvPr/>
         </p:nvSpPr>
@@ -13821,7 +13998,7 @@
       </p:sp>
       <p:sp>
         <p:nvSpPr>
-          <p:cNvPr id="379" name="tb"/>
+          <p:cNvPr id="381" name="tb"/>
           <p:cNvSpPr txBox="1"/>
           <p:nvPr/>
         </p:nvSpPr>
@@ -13860,7 +14037,7 @@
       </p:sp>
       <p:sp>
         <p:nvSpPr>
-          <p:cNvPr id="380" name="tb"/>
+          <p:cNvPr id="382" name="tb"/>
           <p:cNvSpPr txBox="1"/>
           <p:nvPr/>
         </p:nvSpPr>
@@ -13899,7 +14076,7 @@
       </p:sp>
       <p:cxnSp>
         <p:nvCxnSpPr>
-          <p:cNvPr id="381" name="ln"/>
+          <p:cNvPr id="383" name="ln"/>
           <p:cNvCxnSpPr/>
           <p:nvPr/>
         </p:nvCxnSpPr>
@@ -13920,7 +14097,7 @@
       </p:cxnSp>
       <p:sp>
         <p:nvSpPr>
-          <p:cNvPr id="382" name="card"/>
+          <p:cNvPr id="384" name="card"/>
           <p:cNvSpPr/>
           <p:nvPr/>
         </p:nvSpPr>
@@ -13982,7 +14159,7 @@
       </p:sp>
       <p:sp>
         <p:nvSpPr>
-          <p:cNvPr id="383" name="card"/>
+          <p:cNvPr id="385" name="card"/>
           <p:cNvSpPr/>
           <p:nvPr/>
         </p:nvSpPr>
@@ -14089,7 +14266,7 @@
       </p:sp>
       <p:sp>
         <p:nvSpPr>
-          <p:cNvPr id="384" name="tb"/>
+          <p:cNvPr id="386" name="tb"/>
           <p:cNvSpPr txBox="1"/>
           <p:nvPr/>
         </p:nvSpPr>
@@ -14128,7 +14305,7 @@
       </p:sp>
       <p:sp>
         <p:nvSpPr>
-          <p:cNvPr id="385" name="tb"/>
+          <p:cNvPr id="387" name="tb"/>
           <p:cNvSpPr txBox="1"/>
           <p:nvPr/>
         </p:nvSpPr>
@@ -14192,7 +14369,7 @@
       </p:grpSpPr>
       <p:sp>
         <p:nvSpPr>
-          <p:cNvPr id="386" name="r"/>
+          <p:cNvPr id="388" name="r"/>
           <p:cNvSpPr/>
           <p:nvPr/>
         </p:nvSpPr>
@@ -14224,7 +14401,7 @@
       </p:sp>
       <p:sp>
         <p:nvSpPr>
-          <p:cNvPr id="387" name="tb"/>
+          <p:cNvPr id="389" name="tb"/>
           <p:cNvSpPr txBox="1"/>
           <p:nvPr/>
         </p:nvSpPr>
@@ -14263,7 +14440,7 @@
       </p:sp>
       <p:sp>
         <p:nvSpPr>
-          <p:cNvPr id="388" name="tb"/>
+          <p:cNvPr id="390" name="tb"/>
           <p:cNvSpPr txBox="1"/>
           <p:nvPr/>
         </p:nvSpPr>
@@ -14302,7 +14479,7 @@
       </p:sp>
       <p:cxnSp>
         <p:nvCxnSpPr>
-          <p:cNvPr id="389" name="ln"/>
+          <p:cNvPr id="391" name="ln"/>
           <p:cNvCxnSpPr/>
           <p:nvPr/>
         </p:nvCxnSpPr>
@@ -14323,7 +14500,7 @@
       </p:cxnSp>
       <p:sp>
         <p:nvSpPr>
-          <p:cNvPr id="390" name="tb"/>
+          <p:cNvPr id="392" name="tb"/>
           <p:cNvSpPr txBox="1"/>
           <p:nvPr/>
         </p:nvSpPr>
@@ -14362,7 +14539,7 @@
       </p:sp>
       <p:sp>
         <p:nvSpPr>
-          <p:cNvPr id="391" name="r"/>
+          <p:cNvPr id="393" name="r"/>
           <p:cNvSpPr/>
           <p:nvPr/>
         </p:nvSpPr>
@@ -14396,7 +14573,7 @@
       </p:sp>
       <p:sp>
         <p:nvSpPr>
-          <p:cNvPr id="392" name="card"/>
+          <p:cNvPr id="394" name="card"/>
           <p:cNvSpPr/>
           <p:nvPr/>
         </p:nvSpPr>
@@ -14427,7 +14604,7 @@
       </p:sp>
       <p:sp>
         <p:nvSpPr>
-          <p:cNvPr id="393" name="tb"/>
+          <p:cNvPr id="395" name="tb"/>
           <p:cNvSpPr txBox="1"/>
           <p:nvPr/>
         </p:nvSpPr>
@@ -14466,7 +14643,7 @@
       </p:sp>
       <p:sp>
         <p:nvSpPr>
-          <p:cNvPr id="394" name="tb"/>
+          <p:cNvPr id="396" name="tb"/>
           <p:cNvSpPr txBox="1"/>
           <p:nvPr/>
         </p:nvSpPr>
@@ -14505,7 +14682,7 @@
       </p:sp>
       <p:sp>
         <p:nvSpPr>
-          <p:cNvPr id="395" name="r"/>
+          <p:cNvPr id="397" name="r"/>
           <p:cNvSpPr/>
           <p:nvPr/>
         </p:nvSpPr>
@@ -14539,7 +14716,7 @@
       </p:sp>
       <p:sp>
         <p:nvSpPr>
-          <p:cNvPr id="396" name="card"/>
+          <p:cNvPr id="398" name="card"/>
           <p:cNvSpPr/>
           <p:nvPr/>
         </p:nvSpPr>
@@ -14570,7 +14747,7 @@
       </p:sp>
       <p:sp>
         <p:nvSpPr>
-          <p:cNvPr id="397" name="tb"/>
+          <p:cNvPr id="399" name="tb"/>
           <p:cNvSpPr txBox="1"/>
           <p:nvPr/>
         </p:nvSpPr>
@@ -14609,7 +14786,7 @@
       </p:sp>
       <p:sp>
         <p:nvSpPr>
-          <p:cNvPr id="398" name="tb"/>
+          <p:cNvPr id="400" name="tb"/>
           <p:cNvSpPr txBox="1"/>
           <p:nvPr/>
         </p:nvSpPr>
@@ -14648,7 +14825,7 @@
       </p:sp>
       <p:sp>
         <p:nvSpPr>
-          <p:cNvPr id="399" name="r"/>
+          <p:cNvPr id="401" name="r"/>
           <p:cNvSpPr/>
           <p:nvPr/>
         </p:nvSpPr>
@@ -14682,7 +14859,7 @@
       </p:sp>
       <p:sp>
         <p:nvSpPr>
-          <p:cNvPr id="400" name="card"/>
+          <p:cNvPr id="402" name="card"/>
           <p:cNvSpPr/>
           <p:nvPr/>
         </p:nvSpPr>
@@ -14713,7 +14890,7 @@
       </p:sp>
       <p:sp>
         <p:nvSpPr>
-          <p:cNvPr id="401" name="tb"/>
+          <p:cNvPr id="403" name="tb"/>
           <p:cNvSpPr txBox="1"/>
           <p:nvPr/>
         </p:nvSpPr>
@@ -14752,7 +14929,7 @@
       </p:sp>
       <p:sp>
         <p:nvSpPr>
-          <p:cNvPr id="402" name="card"/>
+          <p:cNvPr id="404" name="card"/>
           <p:cNvSpPr/>
           <p:nvPr/>
         </p:nvSpPr>
@@ -14814,7 +14991,7 @@
       </p:sp>
       <p:sp>
         <p:nvSpPr>
-          <p:cNvPr id="403" name="tb"/>
+          <p:cNvPr id="405" name="tb"/>
           <p:cNvSpPr txBox="1"/>
           <p:nvPr/>
         </p:nvSpPr>
@@ -14853,7 +15030,7 @@
       </p:sp>
       <p:sp>
         <p:nvSpPr>
-          <p:cNvPr id="404" name="tb"/>
+          <p:cNvPr id="406" name="tb"/>
           <p:cNvSpPr txBox="1"/>
           <p:nvPr/>
         </p:nvSpPr>
@@ -14917,7 +15094,7 @@
       </p:grpSpPr>
       <p:sp>
         <p:nvSpPr>
-          <p:cNvPr id="405" name="r"/>
+          <p:cNvPr id="407" name="r"/>
           <p:cNvSpPr/>
           <p:nvPr/>
         </p:nvSpPr>
@@ -14949,7 +15126,7 @@
       </p:sp>
       <p:sp>
         <p:nvSpPr>
-          <p:cNvPr id="406" name="tb"/>
+          <p:cNvPr id="408" name="tb"/>
           <p:cNvSpPr txBox="1"/>
           <p:nvPr/>
         </p:nvSpPr>
@@ -14988,7 +15165,7 @@
       </p:sp>
       <p:sp>
         <p:nvSpPr>
-          <p:cNvPr id="407" name="tb"/>
+          <p:cNvPr id="409" name="tb"/>
           <p:cNvSpPr txBox="1"/>
           <p:nvPr/>
         </p:nvSpPr>
@@ -15027,7 +15204,7 @@
       </p:sp>
       <p:cxnSp>
         <p:nvCxnSpPr>
-          <p:cNvPr id="408" name="ln"/>
+          <p:cNvPr id="410" name="ln"/>
           <p:cNvCxnSpPr/>
           <p:nvPr/>
         </p:nvCxnSpPr>
@@ -15048,7 +15225,7 @@
       </p:cxnSp>
       <p:sp>
         <p:nvSpPr>
-          <p:cNvPr id="409" name="card"/>
+          <p:cNvPr id="411" name="card"/>
           <p:cNvSpPr/>
           <p:nvPr/>
         </p:nvSpPr>
@@ -15169,7 +15346,7 @@
       </p:sp>
       <p:sp>
         <p:nvSpPr>
-          <p:cNvPr id="410" name="tb"/>
+          <p:cNvPr id="412" name="tb"/>
           <p:cNvSpPr txBox="1"/>
           <p:nvPr/>
         </p:nvSpPr>
@@ -15208,7 +15385,7 @@
       </p:sp>
       <p:sp>
         <p:nvSpPr>
-          <p:cNvPr id="411" name="tb"/>
+          <p:cNvPr id="413" name="tb"/>
           <p:cNvSpPr txBox="1"/>
           <p:nvPr/>
         </p:nvSpPr>
@@ -15272,7 +15449,7 @@
       </p:grpSpPr>
       <p:sp>
         <p:nvSpPr>
-          <p:cNvPr id="412" name="r"/>
+          <p:cNvPr id="414" name="r"/>
           <p:cNvSpPr/>
           <p:nvPr/>
         </p:nvSpPr>
@@ -15304,7 +15481,7 @@
       </p:sp>
       <p:sp>
         <p:nvSpPr>
-          <p:cNvPr id="413" name="tb"/>
+          <p:cNvPr id="415" name="tb"/>
           <p:cNvSpPr txBox="1"/>
           <p:nvPr/>
         </p:nvSpPr>
@@ -15343,7 +15520,7 @@
       </p:sp>
       <p:sp>
         <p:nvSpPr>
-          <p:cNvPr id="414" name="tb"/>
+          <p:cNvPr id="416" name="tb"/>
           <p:cNvSpPr txBox="1"/>
           <p:nvPr/>
         </p:nvSpPr>
@@ -15382,7 +15559,7 @@
       </p:sp>
       <p:cxnSp>
         <p:nvCxnSpPr>
-          <p:cNvPr id="415" name="ln"/>
+          <p:cNvPr id="417" name="ln"/>
           <p:cNvCxnSpPr/>
           <p:nvPr/>
         </p:nvCxnSpPr>
@@ -15403,7 +15580,7 @@
       </p:cxnSp>
       <p:sp>
         <p:nvSpPr>
-          <p:cNvPr id="416" name="card"/>
+          <p:cNvPr id="418" name="card"/>
           <p:cNvSpPr/>
           <p:nvPr/>
         </p:nvSpPr>
@@ -15507,7 +15684,7 @@
       </p:sp>
       <p:sp>
         <p:nvSpPr>
-          <p:cNvPr id="417" name="card"/>
+          <p:cNvPr id="419" name="card"/>
           <p:cNvSpPr/>
           <p:nvPr/>
         </p:nvSpPr>
@@ -15611,7 +15788,7 @@
       </p:sp>
       <p:sp>
         <p:nvSpPr>
-          <p:cNvPr id="418" name="card"/>
+          <p:cNvPr id="420" name="card"/>
           <p:cNvSpPr/>
           <p:nvPr/>
         </p:nvSpPr>
@@ -15715,7 +15892,7 @@
       </p:sp>
       <p:sp>
         <p:nvSpPr>
-          <p:cNvPr id="419" name="card"/>
+          <p:cNvPr id="421" name="card"/>
           <p:cNvSpPr/>
           <p:nvPr/>
         </p:nvSpPr>
@@ -15777,7 +15954,7 @@
       </p:sp>
       <p:sp>
         <p:nvSpPr>
-          <p:cNvPr id="420" name="tb"/>
+          <p:cNvPr id="422" name="tb"/>
           <p:cNvSpPr txBox="1"/>
           <p:nvPr/>
         </p:nvSpPr>
@@ -15816,7 +15993,7 @@
       </p:sp>
       <p:sp>
         <p:nvSpPr>
-          <p:cNvPr id="421" name="tb"/>
+          <p:cNvPr id="423" name="tb"/>
           <p:cNvSpPr txBox="1"/>
           <p:nvPr/>
         </p:nvSpPr>
@@ -15880,7 +16057,7 @@
       </p:grpSpPr>
       <p:sp>
         <p:nvSpPr>
-          <p:cNvPr id="28" name="r"/>
+          <p:cNvPr id="30" name="r"/>
           <p:cNvSpPr/>
           <p:nvPr/>
         </p:nvSpPr>
@@ -15912,7 +16089,7 @@
       </p:sp>
       <p:sp>
         <p:nvSpPr>
-          <p:cNvPr id="29" name="tb"/>
+          <p:cNvPr id="31" name="tb"/>
           <p:cNvSpPr txBox="1"/>
           <p:nvPr/>
         </p:nvSpPr>
@@ -15951,7 +16128,7 @@
       </p:sp>
       <p:sp>
         <p:nvSpPr>
-          <p:cNvPr id="30" name="tb"/>
+          <p:cNvPr id="32" name="tb"/>
           <p:cNvSpPr txBox="1"/>
           <p:nvPr/>
         </p:nvSpPr>
@@ -15990,7 +16167,7 @@
       </p:sp>
       <p:cxnSp>
         <p:nvCxnSpPr>
-          <p:cNvPr id="31" name="ln"/>
+          <p:cNvPr id="33" name="ln"/>
           <p:cNvCxnSpPr/>
           <p:nvPr/>
         </p:nvCxnSpPr>
@@ -16011,7 +16188,7 @@
       </p:cxnSp>
       <p:sp>
         <p:nvSpPr>
-          <p:cNvPr id="32" name="card"/>
+          <p:cNvPr id="34" name="card"/>
           <p:cNvSpPr/>
           <p:nvPr/>
         </p:nvSpPr>
@@ -16113,7 +16290,7 @@
       </p:sp>
       <p:sp>
         <p:nvSpPr>
-          <p:cNvPr id="33" name="card"/>
+          <p:cNvPr id="35" name="card"/>
           <p:cNvSpPr/>
           <p:nvPr/>
         </p:nvSpPr>
@@ -16269,7 +16446,7 @@
       </p:sp>
       <p:sp>
         <p:nvSpPr>
-          <p:cNvPr id="34" name="card"/>
+          <p:cNvPr id="36" name="card"/>
           <p:cNvSpPr/>
           <p:nvPr/>
         </p:nvSpPr>
@@ -16331,7 +16508,7 @@
       </p:sp>
       <p:sp>
         <p:nvSpPr>
-          <p:cNvPr id="35" name="tb"/>
+          <p:cNvPr id="37" name="tb"/>
           <p:cNvSpPr txBox="1"/>
           <p:nvPr/>
         </p:nvSpPr>
@@ -16370,7 +16547,7 @@
       </p:sp>
       <p:sp>
         <p:nvSpPr>
-          <p:cNvPr id="36" name="tb"/>
+          <p:cNvPr id="38" name="tb"/>
           <p:cNvSpPr txBox="1"/>
           <p:nvPr/>
         </p:nvSpPr>
@@ -16434,7 +16611,7 @@
       </p:grpSpPr>
       <p:sp>
         <p:nvSpPr>
-          <p:cNvPr id="422" name="r"/>
+          <p:cNvPr id="424" name="r"/>
           <p:cNvSpPr/>
           <p:nvPr/>
         </p:nvSpPr>
@@ -16466,7 +16643,7 @@
       </p:sp>
       <p:sp>
         <p:nvSpPr>
-          <p:cNvPr id="423" name="tb"/>
+          <p:cNvPr id="425" name="tb"/>
           <p:cNvSpPr txBox="1"/>
           <p:nvPr/>
         </p:nvSpPr>
@@ -16505,7 +16682,7 @@
       </p:sp>
       <p:sp>
         <p:nvSpPr>
-          <p:cNvPr id="424" name="tb"/>
+          <p:cNvPr id="426" name="tb"/>
           <p:cNvSpPr txBox="1"/>
           <p:nvPr/>
         </p:nvSpPr>
@@ -16544,7 +16721,7 @@
       </p:sp>
       <p:cxnSp>
         <p:nvCxnSpPr>
-          <p:cNvPr id="425" name="ln"/>
+          <p:cNvPr id="427" name="ln"/>
           <p:cNvCxnSpPr/>
           <p:nvPr/>
         </p:nvCxnSpPr>
@@ -16565,7 +16742,7 @@
       </p:cxnSp>
       <p:sp>
         <p:nvSpPr>
-          <p:cNvPr id="426" name="card"/>
+          <p:cNvPr id="428" name="card"/>
           <p:cNvSpPr/>
           <p:nvPr/>
         </p:nvSpPr>
@@ -16686,7 +16863,7 @@
       </p:sp>
       <p:sp>
         <p:nvSpPr>
-          <p:cNvPr id="427" name="tb"/>
+          <p:cNvPr id="429" name="tb"/>
           <p:cNvSpPr txBox="1"/>
           <p:nvPr/>
         </p:nvSpPr>
@@ -16725,7 +16902,7 @@
       </p:sp>
       <p:sp>
         <p:nvSpPr>
-          <p:cNvPr id="428" name="tb"/>
+          <p:cNvPr id="430" name="tb"/>
           <p:cNvSpPr txBox="1"/>
           <p:nvPr/>
         </p:nvSpPr>
@@ -16789,7 +16966,7 @@
       </p:grpSpPr>
       <p:sp>
         <p:nvSpPr>
-          <p:cNvPr id="429" name="r"/>
+          <p:cNvPr id="431" name="r"/>
           <p:cNvSpPr/>
           <p:nvPr/>
         </p:nvSpPr>
@@ -16821,7 +16998,7 @@
       </p:sp>
       <p:sp>
         <p:nvSpPr>
-          <p:cNvPr id="430" name="tb"/>
+          <p:cNvPr id="432" name="tb"/>
           <p:cNvSpPr txBox="1"/>
           <p:nvPr/>
         </p:nvSpPr>
@@ -16860,7 +17037,7 @@
       </p:sp>
       <p:sp>
         <p:nvSpPr>
-          <p:cNvPr id="431" name="tb"/>
+          <p:cNvPr id="433" name="tb"/>
           <p:cNvSpPr txBox="1"/>
           <p:nvPr/>
         </p:nvSpPr>
@@ -16899,7 +17076,7 @@
       </p:sp>
       <p:cxnSp>
         <p:nvCxnSpPr>
-          <p:cNvPr id="432" name="ln"/>
+          <p:cNvPr id="434" name="ln"/>
           <p:cNvCxnSpPr/>
           <p:nvPr/>
         </p:nvCxnSpPr>
@@ -16920,7 +17097,7 @@
       </p:cxnSp>
       <p:sp>
         <p:nvSpPr>
-          <p:cNvPr id="433" name="card"/>
+          <p:cNvPr id="435" name="card"/>
           <p:cNvSpPr/>
           <p:nvPr/>
         </p:nvSpPr>
@@ -16985,7 +17162,7 @@
       </p:sp>
       <p:sp>
         <p:nvSpPr>
-          <p:cNvPr id="434" name="card"/>
+          <p:cNvPr id="436" name="card"/>
           <p:cNvSpPr/>
           <p:nvPr/>
         </p:nvSpPr>
@@ -17050,7 +17227,7 @@
       </p:sp>
       <p:sp>
         <p:nvSpPr>
-          <p:cNvPr id="435" name="card"/>
+          <p:cNvPr id="437" name="card"/>
           <p:cNvSpPr/>
           <p:nvPr/>
         </p:nvSpPr>
@@ -17115,7 +17292,7 @@
       </p:sp>
       <p:sp>
         <p:nvSpPr>
-          <p:cNvPr id="436" name="card"/>
+          <p:cNvPr id="438" name="card"/>
           <p:cNvSpPr/>
           <p:nvPr/>
         </p:nvSpPr>
@@ -17180,7 +17357,7 @@
       </p:sp>
       <p:sp>
         <p:nvSpPr>
-          <p:cNvPr id="437" name="card"/>
+          <p:cNvPr id="439" name="card"/>
           <p:cNvSpPr/>
           <p:nvPr/>
         </p:nvSpPr>
@@ -17245,7 +17422,7 @@
       </p:sp>
       <p:sp>
         <p:nvSpPr>
-          <p:cNvPr id="438" name="card"/>
+          <p:cNvPr id="440" name="card"/>
           <p:cNvSpPr/>
           <p:nvPr/>
         </p:nvSpPr>
@@ -17310,7 +17487,7 @@
       </p:sp>
       <p:sp>
         <p:nvSpPr>
-          <p:cNvPr id="439" name="card"/>
+          <p:cNvPr id="441" name="card"/>
           <p:cNvSpPr/>
           <p:nvPr/>
         </p:nvSpPr>
@@ -17372,7 +17549,7 @@
       </p:sp>
       <p:sp>
         <p:nvSpPr>
-          <p:cNvPr id="440" name="tb"/>
+          <p:cNvPr id="442" name="tb"/>
           <p:cNvSpPr txBox="1"/>
           <p:nvPr/>
         </p:nvSpPr>
@@ -17411,7 +17588,7 @@
       </p:sp>
       <p:sp>
         <p:nvSpPr>
-          <p:cNvPr id="441" name="tb"/>
+          <p:cNvPr id="443" name="tb"/>
           <p:cNvSpPr txBox="1"/>
           <p:nvPr/>
         </p:nvSpPr>
@@ -17475,7 +17652,7 @@
       </p:grpSpPr>
       <p:sp>
         <p:nvSpPr>
-          <p:cNvPr id="442" name="r"/>
+          <p:cNvPr id="444" name="r"/>
           <p:cNvSpPr/>
           <p:nvPr/>
         </p:nvSpPr>
@@ -17507,7 +17684,7 @@
       </p:sp>
       <p:sp>
         <p:nvSpPr>
-          <p:cNvPr id="443" name="tb"/>
+          <p:cNvPr id="445" name="tb"/>
           <p:cNvSpPr txBox="1"/>
           <p:nvPr/>
         </p:nvSpPr>
@@ -17546,7 +17723,7 @@
       </p:sp>
       <p:sp>
         <p:nvSpPr>
-          <p:cNvPr id="444" name="tb"/>
+          <p:cNvPr id="446" name="tb"/>
           <p:cNvSpPr txBox="1"/>
           <p:nvPr/>
         </p:nvSpPr>
@@ -17585,7 +17762,7 @@
       </p:sp>
       <p:cxnSp>
         <p:nvCxnSpPr>
-          <p:cNvPr id="445" name="ln"/>
+          <p:cNvPr id="447" name="ln"/>
           <p:cNvCxnSpPr/>
           <p:nvPr/>
         </p:nvCxnSpPr>
@@ -17606,7 +17783,7 @@
       </p:cxnSp>
       <p:sp>
         <p:nvSpPr>
-          <p:cNvPr id="446" name="r"/>
+          <p:cNvPr id="448" name="r"/>
           <p:cNvSpPr/>
           <p:nvPr/>
         </p:nvSpPr>
@@ -17650,7 +17827,7 @@
       </p:sp>
       <p:sp>
         <p:nvSpPr>
-          <p:cNvPr id="447" name="r"/>
+          <p:cNvPr id="449" name="r"/>
           <p:cNvSpPr/>
           <p:nvPr/>
         </p:nvSpPr>
@@ -17694,7 +17871,7 @@
       </p:sp>
       <p:sp>
         <p:nvSpPr>
-          <p:cNvPr id="448" name="r"/>
+          <p:cNvPr id="450" name="r"/>
           <p:cNvSpPr/>
           <p:nvPr/>
         </p:nvSpPr>
@@ -17738,7 +17915,7 @@
       </p:sp>
       <p:sp>
         <p:nvSpPr>
-          <p:cNvPr id="449" name="r"/>
+          <p:cNvPr id="451" name="r"/>
           <p:cNvSpPr/>
           <p:nvPr/>
         </p:nvSpPr>
@@ -17784,7 +17961,7 @@
       </p:sp>
       <p:sp>
         <p:nvSpPr>
-          <p:cNvPr id="450" name="r"/>
+          <p:cNvPr id="452" name="r"/>
           <p:cNvSpPr/>
           <p:nvPr/>
         </p:nvSpPr>
@@ -17830,7 +18007,7 @@
       </p:sp>
       <p:sp>
         <p:nvSpPr>
-          <p:cNvPr id="451" name="r"/>
+          <p:cNvPr id="453" name="r"/>
           <p:cNvSpPr/>
           <p:nvPr/>
         </p:nvSpPr>
@@ -17876,7 +18053,7 @@
       </p:sp>
       <p:sp>
         <p:nvSpPr>
-          <p:cNvPr id="452" name="r"/>
+          <p:cNvPr id="454" name="r"/>
           <p:cNvSpPr/>
           <p:nvPr/>
         </p:nvSpPr>
@@ -17922,7 +18099,7 @@
       </p:sp>
       <p:sp>
         <p:nvSpPr>
-          <p:cNvPr id="453" name="r"/>
+          <p:cNvPr id="455" name="r"/>
           <p:cNvSpPr/>
           <p:nvPr/>
         </p:nvSpPr>
@@ -17968,7 +18145,7 @@
       </p:sp>
       <p:sp>
         <p:nvSpPr>
-          <p:cNvPr id="454" name="r"/>
+          <p:cNvPr id="456" name="r"/>
           <p:cNvSpPr/>
           <p:nvPr/>
         </p:nvSpPr>
@@ -18014,7 +18191,7 @@
       </p:sp>
       <p:sp>
         <p:nvSpPr>
-          <p:cNvPr id="455" name="r"/>
+          <p:cNvPr id="457" name="r"/>
           <p:cNvSpPr/>
           <p:nvPr/>
         </p:nvSpPr>
@@ -18060,7 +18237,7 @@
       </p:sp>
       <p:sp>
         <p:nvSpPr>
-          <p:cNvPr id="456" name="r"/>
+          <p:cNvPr id="458" name="r"/>
           <p:cNvSpPr/>
           <p:nvPr/>
         </p:nvSpPr>
@@ -18106,7 +18283,7 @@
       </p:sp>
       <p:sp>
         <p:nvSpPr>
-          <p:cNvPr id="457" name="r"/>
+          <p:cNvPr id="459" name="r"/>
           <p:cNvSpPr/>
           <p:nvPr/>
         </p:nvSpPr>
@@ -18152,7 +18329,7 @@
       </p:sp>
       <p:sp>
         <p:nvSpPr>
-          <p:cNvPr id="458" name="r"/>
+          <p:cNvPr id="460" name="r"/>
           <p:cNvSpPr/>
           <p:nvPr/>
         </p:nvSpPr>
@@ -18198,7 +18375,7 @@
       </p:sp>
       <p:sp>
         <p:nvSpPr>
-          <p:cNvPr id="459" name="r"/>
+          <p:cNvPr id="461" name="r"/>
           <p:cNvSpPr/>
           <p:nvPr/>
         </p:nvSpPr>
@@ -18244,7 +18421,7 @@
       </p:sp>
       <p:sp>
         <p:nvSpPr>
-          <p:cNvPr id="460" name="r"/>
+          <p:cNvPr id="462" name="r"/>
           <p:cNvSpPr/>
           <p:nvPr/>
         </p:nvSpPr>
@@ -18290,7 +18467,7 @@
       </p:sp>
       <p:sp>
         <p:nvSpPr>
-          <p:cNvPr id="461" name="card"/>
+          <p:cNvPr id="463" name="card"/>
           <p:cNvSpPr/>
           <p:nvPr/>
         </p:nvSpPr>
@@ -18352,7 +18529,7 @@
       </p:sp>
       <p:sp>
         <p:nvSpPr>
-          <p:cNvPr id="462" name="tb"/>
+          <p:cNvPr id="464" name="tb"/>
           <p:cNvSpPr txBox="1"/>
           <p:nvPr/>
         </p:nvSpPr>
@@ -18391,7 +18568,7 @@
       </p:sp>
       <p:sp>
         <p:nvSpPr>
-          <p:cNvPr id="463" name="tb"/>
+          <p:cNvPr id="465" name="tb"/>
           <p:cNvSpPr txBox="1"/>
           <p:nvPr/>
         </p:nvSpPr>
@@ -18455,7 +18632,7 @@
       </p:grpSpPr>
       <p:sp>
         <p:nvSpPr>
-          <p:cNvPr id="464" name="r"/>
+          <p:cNvPr id="466" name="r"/>
           <p:cNvSpPr/>
           <p:nvPr/>
         </p:nvSpPr>
@@ -18487,7 +18664,7 @@
       </p:sp>
       <p:sp>
         <p:nvSpPr>
-          <p:cNvPr id="465" name="tb"/>
+          <p:cNvPr id="467" name="tb"/>
           <p:cNvSpPr txBox="1"/>
           <p:nvPr/>
         </p:nvSpPr>
@@ -18526,7 +18703,7 @@
       </p:sp>
       <p:sp>
         <p:nvSpPr>
-          <p:cNvPr id="466" name="tb"/>
+          <p:cNvPr id="468" name="tb"/>
           <p:cNvSpPr txBox="1"/>
           <p:nvPr/>
         </p:nvSpPr>
@@ -18565,7 +18742,7 @@
       </p:sp>
       <p:cxnSp>
         <p:nvCxnSpPr>
-          <p:cNvPr id="467" name="ln"/>
+          <p:cNvPr id="469" name="ln"/>
           <p:cNvCxnSpPr/>
           <p:nvPr/>
         </p:nvCxnSpPr>
@@ -18586,7 +18763,7 @@
       </p:cxnSp>
       <p:sp>
         <p:nvSpPr>
-          <p:cNvPr id="468" name="card"/>
+          <p:cNvPr id="470" name="card"/>
           <p:cNvSpPr/>
           <p:nvPr/>
         </p:nvSpPr>
@@ -18725,7 +18902,7 @@
       </p:sp>
       <p:sp>
         <p:nvSpPr>
-          <p:cNvPr id="469" name="tb"/>
+          <p:cNvPr id="471" name="tb"/>
           <p:cNvSpPr txBox="1"/>
           <p:nvPr/>
         </p:nvSpPr>
@@ -18764,7 +18941,7 @@
       </p:sp>
       <p:sp>
         <p:nvSpPr>
-          <p:cNvPr id="470" name="tb"/>
+          <p:cNvPr id="472" name="tb"/>
           <p:cNvSpPr txBox="1"/>
           <p:nvPr/>
         </p:nvSpPr>
@@ -18828,7 +19005,7 @@
       </p:grpSpPr>
       <p:sp>
         <p:nvSpPr>
-          <p:cNvPr id="471" name="r"/>
+          <p:cNvPr id="473" name="r"/>
           <p:cNvSpPr/>
           <p:nvPr/>
         </p:nvSpPr>
@@ -18860,7 +19037,7 @@
       </p:sp>
       <p:sp>
         <p:nvSpPr>
-          <p:cNvPr id="472" name="tb"/>
+          <p:cNvPr id="474" name="tb"/>
           <p:cNvSpPr txBox="1"/>
           <p:nvPr/>
         </p:nvSpPr>
@@ -18899,7 +19076,7 @@
       </p:sp>
       <p:sp>
         <p:nvSpPr>
-          <p:cNvPr id="473" name="tb"/>
+          <p:cNvPr id="475" name="tb"/>
           <p:cNvSpPr txBox="1"/>
           <p:nvPr/>
         </p:nvSpPr>
@@ -18938,7 +19115,7 @@
       </p:sp>
       <p:cxnSp>
         <p:nvCxnSpPr>
-          <p:cNvPr id="474" name="ln"/>
+          <p:cNvPr id="476" name="ln"/>
           <p:cNvCxnSpPr/>
           <p:nvPr/>
         </p:nvCxnSpPr>
@@ -18959,7 +19136,7 @@
       </p:cxnSp>
       <p:sp>
         <p:nvSpPr>
-          <p:cNvPr id="475" name="r"/>
+          <p:cNvPr id="477" name="r"/>
           <p:cNvSpPr/>
           <p:nvPr/>
         </p:nvSpPr>
@@ -19003,7 +19180,7 @@
       </p:sp>
       <p:sp>
         <p:nvSpPr>
-          <p:cNvPr id="476" name="r"/>
+          <p:cNvPr id="478" name="r"/>
           <p:cNvSpPr/>
           <p:nvPr/>
         </p:nvSpPr>
@@ -19047,7 +19224,7 @@
       </p:sp>
       <p:sp>
         <p:nvSpPr>
-          <p:cNvPr id="477" name="r"/>
+          <p:cNvPr id="479" name="r"/>
           <p:cNvSpPr/>
           <p:nvPr/>
         </p:nvSpPr>
@@ -19093,7 +19270,7 @@
       </p:sp>
       <p:sp>
         <p:nvSpPr>
-          <p:cNvPr id="478" name="r"/>
+          <p:cNvPr id="480" name="r"/>
           <p:cNvSpPr/>
           <p:nvPr/>
         </p:nvSpPr>
@@ -19139,7 +19316,7 @@
       </p:sp>
       <p:sp>
         <p:nvSpPr>
-          <p:cNvPr id="479" name="r"/>
+          <p:cNvPr id="481" name="r"/>
           <p:cNvSpPr/>
           <p:nvPr/>
         </p:nvSpPr>
@@ -19185,7 +19362,7 @@
       </p:sp>
       <p:sp>
         <p:nvSpPr>
-          <p:cNvPr id="480" name="r"/>
+          <p:cNvPr id="482" name="r"/>
           <p:cNvSpPr/>
           <p:nvPr/>
         </p:nvSpPr>
@@ -19231,7 +19408,7 @@
       </p:sp>
       <p:sp>
         <p:nvSpPr>
-          <p:cNvPr id="481" name="r"/>
+          <p:cNvPr id="483" name="r"/>
           <p:cNvSpPr/>
           <p:nvPr/>
         </p:nvSpPr>
@@ -19277,7 +19454,7 @@
       </p:sp>
       <p:sp>
         <p:nvSpPr>
-          <p:cNvPr id="482" name="r"/>
+          <p:cNvPr id="484" name="r"/>
           <p:cNvSpPr/>
           <p:nvPr/>
         </p:nvSpPr>
@@ -19323,7 +19500,7 @@
       </p:sp>
       <p:sp>
         <p:nvSpPr>
-          <p:cNvPr id="483" name="r"/>
+          <p:cNvPr id="485" name="r"/>
           <p:cNvSpPr/>
           <p:nvPr/>
         </p:nvSpPr>
@@ -19369,7 +19546,7 @@
       </p:sp>
       <p:sp>
         <p:nvSpPr>
-          <p:cNvPr id="484" name="r"/>
+          <p:cNvPr id="486" name="r"/>
           <p:cNvSpPr/>
           <p:nvPr/>
         </p:nvSpPr>
@@ -19415,7 +19592,7 @@
       </p:sp>
       <p:sp>
         <p:nvSpPr>
-          <p:cNvPr id="485" name="r"/>
+          <p:cNvPr id="487" name="r"/>
           <p:cNvSpPr/>
           <p:nvPr/>
         </p:nvSpPr>
@@ -19461,7 +19638,7 @@
       </p:sp>
       <p:sp>
         <p:nvSpPr>
-          <p:cNvPr id="486" name="r"/>
+          <p:cNvPr id="488" name="r"/>
           <p:cNvSpPr/>
           <p:nvPr/>
         </p:nvSpPr>
@@ -19507,7 +19684,7 @@
       </p:sp>
       <p:sp>
         <p:nvSpPr>
-          <p:cNvPr id="487" name="r"/>
+          <p:cNvPr id="489" name="r"/>
           <p:cNvSpPr/>
           <p:nvPr/>
         </p:nvSpPr>
@@ -19553,7 +19730,7 @@
       </p:sp>
       <p:sp>
         <p:nvSpPr>
-          <p:cNvPr id="488" name="r"/>
+          <p:cNvPr id="490" name="r"/>
           <p:cNvSpPr/>
           <p:nvPr/>
         </p:nvSpPr>
@@ -19599,7 +19776,7 @@
       </p:sp>
       <p:sp>
         <p:nvSpPr>
-          <p:cNvPr id="489" name="r"/>
+          <p:cNvPr id="491" name="r"/>
           <p:cNvSpPr/>
           <p:nvPr/>
         </p:nvSpPr>
@@ -19645,7 +19822,7 @@
       </p:sp>
       <p:sp>
         <p:nvSpPr>
-          <p:cNvPr id="490" name="r"/>
+          <p:cNvPr id="492" name="r"/>
           <p:cNvSpPr/>
           <p:nvPr/>
         </p:nvSpPr>
@@ -19691,7 +19868,7 @@
       </p:sp>
       <p:sp>
         <p:nvSpPr>
-          <p:cNvPr id="491" name="tb"/>
+          <p:cNvPr id="493" name="tb"/>
           <p:cNvSpPr txBox="1"/>
           <p:nvPr/>
         </p:nvSpPr>
@@ -19730,7 +19907,7 @@
       </p:sp>
       <p:sp>
         <p:nvSpPr>
-          <p:cNvPr id="492" name="tb"/>
+          <p:cNvPr id="494" name="tb"/>
           <p:cNvSpPr txBox="1"/>
           <p:nvPr/>
         </p:nvSpPr>
@@ -19794,7 +19971,7 @@
       </p:grpSpPr>
       <p:sp>
         <p:nvSpPr>
-          <p:cNvPr id="493" name="r"/>
+          <p:cNvPr id="495" name="r"/>
           <p:cNvSpPr/>
           <p:nvPr/>
         </p:nvSpPr>
@@ -19826,7 +20003,7 @@
       </p:sp>
       <p:sp>
         <p:nvSpPr>
-          <p:cNvPr id="494" name="tb"/>
+          <p:cNvPr id="496" name="tb"/>
           <p:cNvSpPr txBox="1"/>
           <p:nvPr/>
         </p:nvSpPr>
@@ -19865,7 +20042,7 @@
       </p:sp>
       <p:sp>
         <p:nvSpPr>
-          <p:cNvPr id="495" name="tb"/>
+          <p:cNvPr id="497" name="tb"/>
           <p:cNvSpPr txBox="1"/>
           <p:nvPr/>
         </p:nvSpPr>
@@ -19904,7 +20081,7 @@
       </p:sp>
       <p:cxnSp>
         <p:nvCxnSpPr>
-          <p:cNvPr id="496" name="ln"/>
+          <p:cNvPr id="498" name="ln"/>
           <p:cNvCxnSpPr/>
           <p:nvPr/>
         </p:nvCxnSpPr>
@@ -19925,7 +20102,7 @@
       </p:cxnSp>
       <p:sp>
         <p:nvSpPr>
-          <p:cNvPr id="497" name="card"/>
+          <p:cNvPr id="499" name="card"/>
           <p:cNvSpPr/>
           <p:nvPr/>
         </p:nvSpPr>
@@ -20063,7 +20240,7 @@
       </p:sp>
       <p:sp>
         <p:nvSpPr>
-          <p:cNvPr id="498" name="card"/>
+          <p:cNvPr id="500" name="card"/>
           <p:cNvSpPr/>
           <p:nvPr/>
         </p:nvSpPr>
@@ -20201,7 +20378,7 @@
       </p:sp>
       <p:sp>
         <p:nvSpPr>
-          <p:cNvPr id="499" name="tb"/>
+          <p:cNvPr id="501" name="tb"/>
           <p:cNvSpPr txBox="1"/>
           <p:nvPr/>
         </p:nvSpPr>
@@ -20240,7 +20417,7 @@
       </p:sp>
       <p:sp>
         <p:nvSpPr>
-          <p:cNvPr id="500" name="tb"/>
+          <p:cNvPr id="502" name="tb"/>
           <p:cNvSpPr txBox="1"/>
           <p:nvPr/>
         </p:nvSpPr>
@@ -20304,7 +20481,7 @@
       </p:grpSpPr>
       <p:sp>
         <p:nvSpPr>
-          <p:cNvPr id="501" name="r"/>
+          <p:cNvPr id="503" name="r"/>
           <p:cNvSpPr/>
           <p:nvPr/>
         </p:nvSpPr>
@@ -20336,7 +20513,7 @@
       </p:sp>
       <p:sp>
         <p:nvSpPr>
-          <p:cNvPr id="502" name="tb"/>
+          <p:cNvPr id="504" name="tb"/>
           <p:cNvSpPr txBox="1"/>
           <p:nvPr/>
         </p:nvSpPr>
@@ -20375,7 +20552,7 @@
       </p:sp>
       <p:sp>
         <p:nvSpPr>
-          <p:cNvPr id="503" name="tb"/>
+          <p:cNvPr id="505" name="tb"/>
           <p:cNvSpPr txBox="1"/>
           <p:nvPr/>
         </p:nvSpPr>
@@ -20414,7 +20591,7 @@
       </p:sp>
       <p:cxnSp>
         <p:nvCxnSpPr>
-          <p:cNvPr id="504" name="ln"/>
+          <p:cNvPr id="506" name="ln"/>
           <p:cNvCxnSpPr/>
           <p:nvPr/>
         </p:nvCxnSpPr>
@@ -20435,7 +20612,7 @@
       </p:cxnSp>
       <p:sp>
         <p:nvSpPr>
-          <p:cNvPr id="505" name="card"/>
+          <p:cNvPr id="507" name="card"/>
           <p:cNvSpPr/>
           <p:nvPr/>
         </p:nvSpPr>
@@ -20555,7 +20732,7 @@
       </p:sp>
       <p:sp>
         <p:nvSpPr>
-          <p:cNvPr id="506" name="card"/>
+          <p:cNvPr id="508" name="card"/>
           <p:cNvSpPr/>
           <p:nvPr/>
         </p:nvSpPr>
@@ -20675,7 +20852,7 @@
       </p:sp>
       <p:sp>
         <p:nvSpPr>
-          <p:cNvPr id="507" name="card"/>
+          <p:cNvPr id="509" name="card"/>
           <p:cNvSpPr/>
           <p:nvPr/>
         </p:nvSpPr>
@@ -20737,7 +20914,7 @@
       </p:sp>
       <p:sp>
         <p:nvSpPr>
-          <p:cNvPr id="508" name="tb"/>
+          <p:cNvPr id="510" name="tb"/>
           <p:cNvSpPr txBox="1"/>
           <p:nvPr/>
         </p:nvSpPr>
@@ -20776,7 +20953,7 @@
       </p:sp>
       <p:sp>
         <p:nvSpPr>
-          <p:cNvPr id="509" name="tb"/>
+          <p:cNvPr id="511" name="tb"/>
           <p:cNvSpPr txBox="1"/>
           <p:nvPr/>
         </p:nvSpPr>
@@ -20840,7 +21017,7 @@
       </p:grpSpPr>
       <p:sp>
         <p:nvSpPr>
-          <p:cNvPr id="510" name="r"/>
+          <p:cNvPr id="512" name="r"/>
           <p:cNvSpPr/>
           <p:nvPr/>
         </p:nvSpPr>
@@ -20872,7 +21049,7 @@
       </p:sp>
       <p:sp>
         <p:nvSpPr>
-          <p:cNvPr id="511" name="tb"/>
+          <p:cNvPr id="513" name="tb"/>
           <p:cNvSpPr txBox="1"/>
           <p:nvPr/>
         </p:nvSpPr>
@@ -20911,7 +21088,7 @@
       </p:sp>
       <p:sp>
         <p:nvSpPr>
-          <p:cNvPr id="512" name="tb"/>
+          <p:cNvPr id="514" name="tb"/>
           <p:cNvSpPr txBox="1"/>
           <p:nvPr/>
         </p:nvSpPr>
@@ -20950,7 +21127,7 @@
       </p:sp>
       <p:cxnSp>
         <p:nvCxnSpPr>
-          <p:cNvPr id="513" name="ln"/>
+          <p:cNvPr id="515" name="ln"/>
           <p:cNvCxnSpPr/>
           <p:nvPr/>
         </p:nvCxnSpPr>
@@ -20971,7 +21148,7 @@
       </p:cxnSp>
       <p:sp>
         <p:nvSpPr>
-          <p:cNvPr id="514" name="card"/>
+          <p:cNvPr id="516" name="card"/>
           <p:cNvSpPr/>
           <p:nvPr/>
         </p:nvSpPr>
@@ -21036,7 +21213,7 @@
       </p:sp>
       <p:sp>
         <p:nvSpPr>
-          <p:cNvPr id="515" name="card"/>
+          <p:cNvPr id="517" name="card"/>
           <p:cNvSpPr/>
           <p:nvPr/>
         </p:nvSpPr>
@@ -21101,7 +21278,7 @@
       </p:sp>
       <p:sp>
         <p:nvSpPr>
-          <p:cNvPr id="516" name="card"/>
+          <p:cNvPr id="518" name="card"/>
           <p:cNvSpPr/>
           <p:nvPr/>
         </p:nvSpPr>
@@ -21166,7 +21343,7 @@
       </p:sp>
       <p:sp>
         <p:nvSpPr>
-          <p:cNvPr id="517" name="card"/>
+          <p:cNvPr id="519" name="card"/>
           <p:cNvSpPr/>
           <p:nvPr/>
         </p:nvSpPr>
@@ -21231,7 +21408,7 @@
       </p:sp>
       <p:sp>
         <p:nvSpPr>
-          <p:cNvPr id="518" name="tb"/>
+          <p:cNvPr id="520" name="tb"/>
           <p:cNvSpPr txBox="1"/>
           <p:nvPr/>
         </p:nvSpPr>
@@ -21270,7 +21447,7 @@
       </p:sp>
       <p:sp>
         <p:nvSpPr>
-          <p:cNvPr id="519" name="tb"/>
+          <p:cNvPr id="521" name="tb"/>
           <p:cNvSpPr txBox="1"/>
           <p:nvPr/>
         </p:nvSpPr>
@@ -21334,7 +21511,7 @@
       </p:grpSpPr>
       <p:sp>
         <p:nvSpPr>
-          <p:cNvPr id="520" name="r"/>
+          <p:cNvPr id="522" name="r"/>
           <p:cNvSpPr/>
           <p:nvPr/>
         </p:nvSpPr>
@@ -21366,7 +21543,7 @@
       </p:sp>
       <p:sp>
         <p:nvSpPr>
-          <p:cNvPr id="521" name="tb"/>
+          <p:cNvPr id="523" name="tb"/>
           <p:cNvSpPr txBox="1"/>
           <p:nvPr/>
         </p:nvSpPr>
@@ -21405,7 +21582,7 @@
       </p:sp>
       <p:sp>
         <p:nvSpPr>
-          <p:cNvPr id="522" name="tb"/>
+          <p:cNvPr id="524" name="tb"/>
           <p:cNvSpPr txBox="1"/>
           <p:nvPr/>
         </p:nvSpPr>
@@ -21444,7 +21621,7 @@
       </p:sp>
       <p:cxnSp>
         <p:nvCxnSpPr>
-          <p:cNvPr id="523" name="ln"/>
+          <p:cNvPr id="525" name="ln"/>
           <p:cNvCxnSpPr/>
           <p:nvPr/>
         </p:nvCxnSpPr>
@@ -21465,7 +21642,7 @@
       </p:cxnSp>
       <p:sp>
         <p:nvSpPr>
-          <p:cNvPr id="524" name="card"/>
+          <p:cNvPr id="526" name="card"/>
           <p:cNvSpPr/>
           <p:nvPr/>
         </p:nvSpPr>
@@ -21591,7 +21768,7 @@
       </p:sp>
       <p:sp>
         <p:nvSpPr>
-          <p:cNvPr id="525" name="card"/>
+          <p:cNvPr id="527" name="card"/>
           <p:cNvSpPr/>
           <p:nvPr/>
         </p:nvSpPr>
@@ -21699,7 +21876,7 @@
       </p:sp>
       <p:sp>
         <p:nvSpPr>
-          <p:cNvPr id="526" name="tb"/>
+          <p:cNvPr id="528" name="tb"/>
           <p:cNvSpPr txBox="1"/>
           <p:nvPr/>
         </p:nvSpPr>
@@ -21738,7 +21915,7 @@
       </p:sp>
       <p:sp>
         <p:nvSpPr>
-          <p:cNvPr id="527" name="tb"/>
+          <p:cNvPr id="529" name="tb"/>
           <p:cNvSpPr txBox="1"/>
           <p:nvPr/>
         </p:nvSpPr>
@@ -21802,7 +21979,7 @@
       </p:grpSpPr>
       <p:sp>
         <p:nvSpPr>
-          <p:cNvPr id="528" name="r"/>
+          <p:cNvPr id="530" name="r"/>
           <p:cNvSpPr/>
           <p:nvPr/>
         </p:nvSpPr>
@@ -21834,7 +22011,7 @@
       </p:sp>
       <p:sp>
         <p:nvSpPr>
-          <p:cNvPr id="529" name="tb"/>
+          <p:cNvPr id="531" name="tb"/>
           <p:cNvSpPr txBox="1"/>
           <p:nvPr/>
         </p:nvSpPr>
@@ -21873,7 +22050,7 @@
       </p:sp>
       <p:sp>
         <p:nvSpPr>
-          <p:cNvPr id="530" name="tb"/>
+          <p:cNvPr id="532" name="tb"/>
           <p:cNvSpPr txBox="1"/>
           <p:nvPr/>
         </p:nvSpPr>
@@ -21912,7 +22089,7 @@
       </p:sp>
       <p:cxnSp>
         <p:nvCxnSpPr>
-          <p:cNvPr id="531" name="ln"/>
+          <p:cNvPr id="533" name="ln"/>
           <p:cNvCxnSpPr/>
           <p:nvPr/>
         </p:nvCxnSpPr>
@@ -21933,7 +22110,7 @@
       </p:cxnSp>
       <p:sp>
         <p:nvSpPr>
-          <p:cNvPr id="532" name="card"/>
+          <p:cNvPr id="534" name="card"/>
           <p:cNvSpPr/>
           <p:nvPr/>
         </p:nvSpPr>
@@ -21990,7 +22167,7 @@
       </p:sp>
       <p:sp>
         <p:nvSpPr>
-          <p:cNvPr id="533" name="card"/>
+          <p:cNvPr id="535" name="card"/>
           <p:cNvSpPr/>
           <p:nvPr/>
         </p:nvSpPr>
@@ -22047,7 +22224,7 @@
       </p:sp>
       <p:sp>
         <p:nvSpPr>
-          <p:cNvPr id="534" name="card"/>
+          <p:cNvPr id="536" name="card"/>
           <p:cNvSpPr/>
           <p:nvPr/>
         </p:nvSpPr>
@@ -22104,7 +22281,7 @@
       </p:sp>
       <p:sp>
         <p:nvSpPr>
-          <p:cNvPr id="535" name="card"/>
+          <p:cNvPr id="537" name="card"/>
           <p:cNvSpPr/>
           <p:nvPr/>
         </p:nvSpPr>
@@ -22161,7 +22338,7 @@
       </p:sp>
       <p:sp>
         <p:nvSpPr>
-          <p:cNvPr id="536" name="card"/>
+          <p:cNvPr id="538" name="card"/>
           <p:cNvSpPr/>
           <p:nvPr/>
         </p:nvSpPr>
@@ -22218,7 +22395,7 @@
       </p:sp>
       <p:sp>
         <p:nvSpPr>
-          <p:cNvPr id="537" name="card"/>
+          <p:cNvPr id="539" name="card"/>
           <p:cNvSpPr/>
           <p:nvPr/>
         </p:nvSpPr>
@@ -22275,7 +22452,7 @@
       </p:sp>
       <p:sp>
         <p:nvSpPr>
-          <p:cNvPr id="538" name="tb"/>
+          <p:cNvPr id="540" name="tb"/>
           <p:cNvSpPr txBox="1"/>
           <p:nvPr/>
         </p:nvSpPr>
@@ -22314,7 +22491,7 @@
       </p:sp>
       <p:sp>
         <p:nvSpPr>
-          <p:cNvPr id="539" name="tb"/>
+          <p:cNvPr id="541" name="tb"/>
           <p:cNvSpPr txBox="1"/>
           <p:nvPr/>
         </p:nvSpPr>
@@ -22378,7 +22555,7 @@
       </p:grpSpPr>
       <p:sp>
         <p:nvSpPr>
-          <p:cNvPr id="37" name="r"/>
+          <p:cNvPr id="39" name="r"/>
           <p:cNvSpPr/>
           <p:nvPr/>
         </p:nvSpPr>
@@ -22410,7 +22587,7 @@
       </p:sp>
       <p:sp>
         <p:nvSpPr>
-          <p:cNvPr id="38" name="tb"/>
+          <p:cNvPr id="40" name="tb"/>
           <p:cNvSpPr txBox="1"/>
           <p:nvPr/>
         </p:nvSpPr>
@@ -22449,7 +22626,7 @@
       </p:sp>
       <p:sp>
         <p:nvSpPr>
-          <p:cNvPr id="39" name="tb"/>
+          <p:cNvPr id="41" name="tb"/>
           <p:cNvSpPr txBox="1"/>
           <p:nvPr/>
         </p:nvSpPr>
@@ -22488,7 +22665,7 @@
       </p:sp>
       <p:cxnSp>
         <p:nvCxnSpPr>
-          <p:cNvPr id="40" name="ln"/>
+          <p:cNvPr id="42" name="ln"/>
           <p:cNvCxnSpPr/>
           <p:nvPr/>
         </p:nvCxnSpPr>
@@ -22509,7 +22686,7 @@
       </p:cxnSp>
       <p:sp>
         <p:nvSpPr>
-          <p:cNvPr id="41" name="card"/>
+          <p:cNvPr id="43" name="card"/>
           <p:cNvSpPr/>
           <p:nvPr/>
         </p:nvSpPr>
@@ -22723,7 +22900,7 @@
       </p:sp>
       <p:sp>
         <p:nvSpPr>
-          <p:cNvPr id="42" name="card"/>
+          <p:cNvPr id="44" name="card"/>
           <p:cNvSpPr/>
           <p:nvPr/>
         </p:nvSpPr>
@@ -22771,7 +22948,7 @@
       </p:sp>
       <p:sp>
         <p:nvSpPr>
-          <p:cNvPr id="43" name="ar"/>
+          <p:cNvPr id="45" name="ar"/>
           <p:cNvSpPr/>
           <p:nvPr/>
         </p:nvSpPr>
@@ -22794,7 +22971,7 @@
       </p:sp>
       <p:sp>
         <p:nvSpPr>
-          <p:cNvPr id="44" name="card"/>
+          <p:cNvPr id="46" name="card"/>
           <p:cNvSpPr/>
           <p:nvPr/>
         </p:nvSpPr>
@@ -22842,7 +23019,7 @@
       </p:sp>
       <p:sp>
         <p:nvSpPr>
-          <p:cNvPr id="45" name="ar"/>
+          <p:cNvPr id="47" name="ar"/>
           <p:cNvSpPr/>
           <p:nvPr/>
         </p:nvSpPr>
@@ -22865,7 +23042,7 @@
       </p:sp>
       <p:sp>
         <p:nvSpPr>
-          <p:cNvPr id="46" name="card"/>
+          <p:cNvPr id="48" name="card"/>
           <p:cNvSpPr/>
           <p:nvPr/>
         </p:nvSpPr>
@@ -22930,7 +23107,7 @@
       </p:sp>
       <p:sp>
         <p:nvSpPr>
-          <p:cNvPr id="47" name="ar"/>
+          <p:cNvPr id="49" name="ar"/>
           <p:cNvSpPr/>
           <p:nvPr/>
         </p:nvSpPr>
@@ -22953,7 +23130,7 @@
       </p:sp>
       <p:sp>
         <p:nvSpPr>
-          <p:cNvPr id="48" name="card"/>
+          <p:cNvPr id="50" name="card"/>
           <p:cNvSpPr/>
           <p:nvPr/>
         </p:nvSpPr>
@@ -23001,7 +23178,7 @@
       </p:sp>
       <p:sp>
         <p:nvSpPr>
-          <p:cNvPr id="49" name="ar"/>
+          <p:cNvPr id="51" name="ar"/>
           <p:cNvSpPr/>
           <p:nvPr/>
         </p:nvSpPr>
@@ -23024,7 +23201,7 @@
       </p:sp>
       <p:sp>
         <p:nvSpPr>
-          <p:cNvPr id="50" name="card"/>
+          <p:cNvPr id="52" name="card"/>
           <p:cNvSpPr/>
           <p:nvPr/>
         </p:nvSpPr>
@@ -23072,7 +23249,7 @@
       </p:sp>
       <p:sp>
         <p:nvSpPr>
-          <p:cNvPr id="51" name="ar"/>
+          <p:cNvPr id="53" name="ar"/>
           <p:cNvSpPr/>
           <p:nvPr/>
         </p:nvSpPr>
@@ -23095,7 +23272,7 @@
       </p:sp>
       <p:sp>
         <p:nvSpPr>
-          <p:cNvPr id="52" name="card"/>
+          <p:cNvPr id="54" name="card"/>
           <p:cNvSpPr/>
           <p:nvPr/>
         </p:nvSpPr>
@@ -23143,7 +23320,7 @@
       </p:sp>
       <p:sp>
         <p:nvSpPr>
-          <p:cNvPr id="53" name="card"/>
+          <p:cNvPr id="55" name="card"/>
           <p:cNvSpPr/>
           <p:nvPr/>
         </p:nvSpPr>
@@ -23205,7 +23382,7 @@
       </p:sp>
       <p:sp>
         <p:nvSpPr>
-          <p:cNvPr id="54" name="tb"/>
+          <p:cNvPr id="56" name="tb"/>
           <p:cNvSpPr txBox="1"/>
           <p:nvPr/>
         </p:nvSpPr>
@@ -23244,7 +23421,7 @@
       </p:sp>
       <p:sp>
         <p:nvSpPr>
-          <p:cNvPr id="55" name="tb"/>
+          <p:cNvPr id="57" name="tb"/>
           <p:cNvSpPr txBox="1"/>
           <p:nvPr/>
         </p:nvSpPr>
@@ -23308,7 +23485,7 @@
       </p:grpSpPr>
       <p:sp>
         <p:nvSpPr>
-          <p:cNvPr id="540" name="r"/>
+          <p:cNvPr id="542" name="r"/>
           <p:cNvSpPr/>
           <p:nvPr/>
         </p:nvSpPr>
@@ -23340,7 +23517,7 @@
       </p:sp>
       <p:sp>
         <p:nvSpPr>
-          <p:cNvPr id="541" name="tb"/>
+          <p:cNvPr id="543" name="tb"/>
           <p:cNvSpPr txBox="1"/>
           <p:nvPr/>
         </p:nvSpPr>
@@ -23379,7 +23556,7 @@
       </p:sp>
       <p:sp>
         <p:nvSpPr>
-          <p:cNvPr id="542" name="tb"/>
+          <p:cNvPr id="544" name="tb"/>
           <p:cNvSpPr txBox="1"/>
           <p:nvPr/>
         </p:nvSpPr>
@@ -23418,7 +23595,7 @@
       </p:sp>
       <p:cxnSp>
         <p:nvCxnSpPr>
-          <p:cNvPr id="543" name="ln"/>
+          <p:cNvPr id="545" name="ln"/>
           <p:cNvCxnSpPr/>
           <p:nvPr/>
         </p:nvCxnSpPr>
@@ -23439,7 +23616,7 @@
       </p:cxnSp>
       <p:sp>
         <p:nvSpPr>
-          <p:cNvPr id="544" name="r"/>
+          <p:cNvPr id="546" name="r"/>
           <p:cNvSpPr/>
           <p:nvPr/>
         </p:nvSpPr>
@@ -23483,7 +23660,7 @@
       </p:sp>
       <p:sp>
         <p:nvSpPr>
-          <p:cNvPr id="545" name="r"/>
+          <p:cNvPr id="547" name="r"/>
           <p:cNvSpPr/>
           <p:nvPr/>
         </p:nvSpPr>
@@ -23527,7 +23704,7 @@
       </p:sp>
       <p:sp>
         <p:nvSpPr>
-          <p:cNvPr id="546" name="r"/>
+          <p:cNvPr id="548" name="r"/>
           <p:cNvSpPr/>
           <p:nvPr/>
         </p:nvSpPr>
@@ -23573,7 +23750,7 @@
       </p:sp>
       <p:sp>
         <p:nvSpPr>
-          <p:cNvPr id="547" name="r"/>
+          <p:cNvPr id="549" name="r"/>
           <p:cNvSpPr/>
           <p:nvPr/>
         </p:nvSpPr>
@@ -23619,7 +23796,7 @@
       </p:sp>
       <p:sp>
         <p:nvSpPr>
-          <p:cNvPr id="548" name="r"/>
+          <p:cNvPr id="550" name="r"/>
           <p:cNvSpPr/>
           <p:nvPr/>
         </p:nvSpPr>
@@ -23665,7 +23842,7 @@
       </p:sp>
       <p:sp>
         <p:nvSpPr>
-          <p:cNvPr id="549" name="r"/>
+          <p:cNvPr id="551" name="r"/>
           <p:cNvSpPr/>
           <p:nvPr/>
         </p:nvSpPr>
@@ -23711,7 +23888,7 @@
       </p:sp>
       <p:sp>
         <p:nvSpPr>
-          <p:cNvPr id="550" name="r"/>
+          <p:cNvPr id="552" name="r"/>
           <p:cNvSpPr/>
           <p:nvPr/>
         </p:nvSpPr>
@@ -23757,7 +23934,7 @@
       </p:sp>
       <p:sp>
         <p:nvSpPr>
-          <p:cNvPr id="551" name="r"/>
+          <p:cNvPr id="553" name="r"/>
           <p:cNvSpPr/>
           <p:nvPr/>
         </p:nvSpPr>
@@ -23803,7 +23980,7 @@
       </p:sp>
       <p:sp>
         <p:nvSpPr>
-          <p:cNvPr id="552" name="r"/>
+          <p:cNvPr id="554" name="r"/>
           <p:cNvSpPr/>
           <p:nvPr/>
         </p:nvSpPr>
@@ -23849,7 +24026,7 @@
       </p:sp>
       <p:sp>
         <p:nvSpPr>
-          <p:cNvPr id="553" name="r"/>
+          <p:cNvPr id="555" name="r"/>
           <p:cNvSpPr/>
           <p:nvPr/>
         </p:nvSpPr>
@@ -23895,7 +24072,7 @@
       </p:sp>
       <p:sp>
         <p:nvSpPr>
-          <p:cNvPr id="554" name="r"/>
+          <p:cNvPr id="556" name="r"/>
           <p:cNvSpPr/>
           <p:nvPr/>
         </p:nvSpPr>
@@ -23941,7 +24118,7 @@
       </p:sp>
       <p:sp>
         <p:nvSpPr>
-          <p:cNvPr id="555" name="r"/>
+          <p:cNvPr id="557" name="r"/>
           <p:cNvSpPr/>
           <p:nvPr/>
         </p:nvSpPr>
@@ -23987,7 +24164,7 @@
       </p:sp>
       <p:sp>
         <p:nvSpPr>
-          <p:cNvPr id="556" name="r"/>
+          <p:cNvPr id="558" name="r"/>
           <p:cNvSpPr/>
           <p:nvPr/>
         </p:nvSpPr>
@@ -24033,7 +24210,7 @@
       </p:sp>
       <p:sp>
         <p:nvSpPr>
-          <p:cNvPr id="557" name="r"/>
+          <p:cNvPr id="559" name="r"/>
           <p:cNvSpPr/>
           <p:nvPr/>
         </p:nvSpPr>
@@ -24079,7 +24256,7 @@
       </p:sp>
       <p:sp>
         <p:nvSpPr>
-          <p:cNvPr id="558" name="r"/>
+          <p:cNvPr id="560" name="r"/>
           <p:cNvSpPr/>
           <p:nvPr/>
         </p:nvSpPr>
@@ -24125,7 +24302,7 @@
       </p:sp>
       <p:sp>
         <p:nvSpPr>
-          <p:cNvPr id="559" name="r"/>
+          <p:cNvPr id="561" name="r"/>
           <p:cNvSpPr/>
           <p:nvPr/>
         </p:nvSpPr>
@@ -24171,7 +24348,7 @@
       </p:sp>
       <p:sp>
         <p:nvSpPr>
-          <p:cNvPr id="560" name="r"/>
+          <p:cNvPr id="562" name="r"/>
           <p:cNvSpPr/>
           <p:nvPr/>
         </p:nvSpPr>
@@ -24217,7 +24394,7 @@
       </p:sp>
       <p:sp>
         <p:nvSpPr>
-          <p:cNvPr id="561" name="r"/>
+          <p:cNvPr id="563" name="r"/>
           <p:cNvSpPr/>
           <p:nvPr/>
         </p:nvSpPr>
@@ -24263,7 +24440,7 @@
       </p:sp>
       <p:sp>
         <p:nvSpPr>
-          <p:cNvPr id="562" name="r"/>
+          <p:cNvPr id="564" name="r"/>
           <p:cNvSpPr/>
           <p:nvPr/>
         </p:nvSpPr>
@@ -24309,7 +24486,7 @@
       </p:sp>
       <p:sp>
         <p:nvSpPr>
-          <p:cNvPr id="563" name="r"/>
+          <p:cNvPr id="565" name="r"/>
           <p:cNvSpPr/>
           <p:nvPr/>
         </p:nvSpPr>
@@ -24355,7 +24532,7 @@
       </p:sp>
       <p:sp>
         <p:nvSpPr>
-          <p:cNvPr id="564" name="r"/>
+          <p:cNvPr id="566" name="r"/>
           <p:cNvSpPr/>
           <p:nvPr/>
         </p:nvSpPr>
@@ -24401,7 +24578,7 @@
       </p:sp>
       <p:sp>
         <p:nvSpPr>
-          <p:cNvPr id="565" name="r"/>
+          <p:cNvPr id="567" name="r"/>
           <p:cNvSpPr/>
           <p:nvPr/>
         </p:nvSpPr>
@@ -24447,7 +24624,7 @@
       </p:sp>
       <p:sp>
         <p:nvSpPr>
-          <p:cNvPr id="566" name="tb"/>
+          <p:cNvPr id="568" name="tb"/>
           <p:cNvSpPr txBox="1"/>
           <p:nvPr/>
         </p:nvSpPr>
@@ -24486,7 +24663,7 @@
       </p:sp>
       <p:sp>
         <p:nvSpPr>
-          <p:cNvPr id="567" name="tb"/>
+          <p:cNvPr id="569" name="tb"/>
           <p:cNvSpPr txBox="1"/>
           <p:nvPr/>
         </p:nvSpPr>
@@ -24550,7 +24727,7 @@
       </p:grpSpPr>
       <p:sp>
         <p:nvSpPr>
-          <p:cNvPr id="568" name="r"/>
+          <p:cNvPr id="570" name="r"/>
           <p:cNvSpPr/>
           <p:nvPr/>
         </p:nvSpPr>
@@ -24582,7 +24759,7 @@
       </p:sp>
       <p:sp>
         <p:nvSpPr>
-          <p:cNvPr id="569" name="tb"/>
+          <p:cNvPr id="571" name="tb"/>
           <p:cNvSpPr txBox="1"/>
           <p:nvPr/>
         </p:nvSpPr>
@@ -24621,7 +24798,7 @@
       </p:sp>
       <p:sp>
         <p:nvSpPr>
-          <p:cNvPr id="570" name="tb"/>
+          <p:cNvPr id="572" name="tb"/>
           <p:cNvSpPr txBox="1"/>
           <p:nvPr/>
         </p:nvSpPr>
@@ -24660,7 +24837,7 @@
       </p:sp>
       <p:cxnSp>
         <p:nvCxnSpPr>
-          <p:cNvPr id="571" name="ln"/>
+          <p:cNvPr id="573" name="ln"/>
           <p:cNvCxnSpPr/>
           <p:nvPr/>
         </p:nvCxnSpPr>
@@ -24681,7 +24858,7 @@
       </p:cxnSp>
       <p:sp>
         <p:nvSpPr>
-          <p:cNvPr id="572" name="tb"/>
+          <p:cNvPr id="574" name="tb"/>
           <p:cNvSpPr txBox="1"/>
           <p:nvPr/>
         </p:nvSpPr>
@@ -24788,7 +24965,7 @@
       </p:sp>
       <p:sp>
         <p:nvSpPr>
-          <p:cNvPr id="573" name="tb"/>
+          <p:cNvPr id="575" name="tb"/>
           <p:cNvSpPr txBox="1"/>
           <p:nvPr/>
         </p:nvSpPr>
@@ -24827,7 +25004,7 @@
       </p:sp>
       <p:sp>
         <p:nvSpPr>
-          <p:cNvPr id="574" name="tb"/>
+          <p:cNvPr id="576" name="tb"/>
           <p:cNvSpPr txBox="1"/>
           <p:nvPr/>
         </p:nvSpPr>
@@ -24891,7 +25068,7 @@
       </p:grpSpPr>
       <p:sp>
         <p:nvSpPr>
-          <p:cNvPr id="575" name="r"/>
+          <p:cNvPr id="577" name="r"/>
           <p:cNvSpPr/>
           <p:nvPr/>
         </p:nvSpPr>
@@ -24923,7 +25100,7 @@
       </p:sp>
       <p:sp>
         <p:nvSpPr>
-          <p:cNvPr id="576" name="tb"/>
+          <p:cNvPr id="578" name="tb"/>
           <p:cNvSpPr txBox="1"/>
           <p:nvPr/>
         </p:nvSpPr>
@@ -24962,7 +25139,7 @@
       </p:sp>
       <p:sp>
         <p:nvSpPr>
-          <p:cNvPr id="577" name="tb"/>
+          <p:cNvPr id="579" name="tb"/>
           <p:cNvSpPr txBox="1"/>
           <p:nvPr/>
         </p:nvSpPr>
@@ -25001,7 +25178,7 @@
       </p:sp>
       <p:cxnSp>
         <p:nvCxnSpPr>
-          <p:cNvPr id="578" name="ln"/>
+          <p:cNvPr id="580" name="ln"/>
           <p:cNvCxnSpPr/>
           <p:nvPr/>
         </p:nvCxnSpPr>
@@ -25022,7 +25199,7 @@
       </p:cxnSp>
       <p:sp>
         <p:nvSpPr>
-          <p:cNvPr id="579" name="tb"/>
+          <p:cNvPr id="581" name="tb"/>
           <p:cNvSpPr txBox="1"/>
           <p:nvPr/>
         </p:nvSpPr>
@@ -25163,7 +25340,7 @@
       </p:sp>
       <p:sp>
         <p:nvSpPr>
-          <p:cNvPr id="580" name="tb"/>
+          <p:cNvPr id="582" name="tb"/>
           <p:cNvSpPr txBox="1"/>
           <p:nvPr/>
         </p:nvSpPr>
@@ -25202,7 +25379,7 @@
       </p:sp>
       <p:sp>
         <p:nvSpPr>
-          <p:cNvPr id="581" name="tb"/>
+          <p:cNvPr id="583" name="tb"/>
           <p:cNvSpPr txBox="1"/>
           <p:nvPr/>
         </p:nvSpPr>
@@ -25266,7 +25443,7 @@
       </p:grpSpPr>
       <p:sp>
         <p:nvSpPr>
-          <p:cNvPr id="582" name="r"/>
+          <p:cNvPr id="584" name="r"/>
           <p:cNvSpPr/>
           <p:nvPr/>
         </p:nvSpPr>
@@ -25298,7 +25475,7 @@
       </p:sp>
       <p:sp>
         <p:nvSpPr>
-          <p:cNvPr id="583" name="o"/>
+          <p:cNvPr id="585" name="o"/>
           <p:cNvSpPr/>
           <p:nvPr/>
         </p:nvSpPr>
@@ -25327,7 +25504,7 @@
       </p:sp>
       <p:sp>
         <p:nvSpPr>
-          <p:cNvPr id="584" name="o"/>
+          <p:cNvPr id="586" name="o"/>
           <p:cNvSpPr/>
           <p:nvPr/>
         </p:nvSpPr>
@@ -25356,7 +25533,7 @@
       </p:sp>
       <p:sp>
         <p:nvSpPr>
-          <p:cNvPr id="585" name="tb"/>
+          <p:cNvPr id="587" name="tb"/>
           <p:cNvSpPr txBox="1"/>
           <p:nvPr/>
         </p:nvSpPr>
@@ -25412,7 +25589,7 @@
       </p:sp>
       <p:sp>
         <p:nvSpPr>
-          <p:cNvPr id="586" name="tb"/>
+          <p:cNvPr id="588" name="tb"/>
           <p:cNvSpPr txBox="1"/>
           <p:nvPr/>
         </p:nvSpPr>
@@ -25476,7 +25653,7 @@
       </p:grpSpPr>
       <p:sp>
         <p:nvSpPr>
-          <p:cNvPr id="56" name="r"/>
+          <p:cNvPr id="58" name="r"/>
           <p:cNvSpPr/>
           <p:nvPr/>
         </p:nvSpPr>
@@ -25508,7 +25685,7 @@
       </p:sp>
       <p:sp>
         <p:nvSpPr>
-          <p:cNvPr id="57" name="tb"/>
+          <p:cNvPr id="59" name="tb"/>
           <p:cNvSpPr txBox="1"/>
           <p:nvPr/>
         </p:nvSpPr>
@@ -25547,7 +25724,7 @@
       </p:sp>
       <p:sp>
         <p:nvSpPr>
-          <p:cNvPr id="58" name="tb"/>
+          <p:cNvPr id="60" name="tb"/>
           <p:cNvSpPr txBox="1"/>
           <p:nvPr/>
         </p:nvSpPr>
@@ -25586,7 +25763,7 @@
       </p:sp>
       <p:cxnSp>
         <p:nvCxnSpPr>
-          <p:cNvPr id="59" name="ln"/>
+          <p:cNvPr id="61" name="ln"/>
           <p:cNvCxnSpPr/>
           <p:nvPr/>
         </p:nvCxnSpPr>
@@ -25607,7 +25784,7 @@
       </p:cxnSp>
       <p:sp>
         <p:nvSpPr>
-          <p:cNvPr id="60" name="card"/>
+          <p:cNvPr id="62" name="card"/>
           <p:cNvSpPr/>
           <p:nvPr/>
         </p:nvSpPr>
@@ -25744,7 +25921,7 @@
       </p:sp>
       <p:sp>
         <p:nvSpPr>
-          <p:cNvPr id="61" name="tb"/>
+          <p:cNvPr id="63" name="tb"/>
           <p:cNvSpPr txBox="1"/>
           <p:nvPr/>
         </p:nvSpPr>
@@ -25783,7 +25960,7 @@
       </p:sp>
       <p:sp>
         <p:nvSpPr>
-          <p:cNvPr id="62" name="tb"/>
+          <p:cNvPr id="64" name="tb"/>
           <p:cNvSpPr txBox="1"/>
           <p:nvPr/>
         </p:nvSpPr>
@@ -25847,7 +26024,7 @@
       </p:grpSpPr>
       <p:sp>
         <p:nvSpPr>
-          <p:cNvPr id="63" name="r"/>
+          <p:cNvPr id="65" name="r"/>
           <p:cNvSpPr/>
           <p:nvPr/>
         </p:nvSpPr>
@@ -25879,7 +26056,7 @@
       </p:sp>
       <p:sp>
         <p:nvSpPr>
-          <p:cNvPr id="64" name="tb"/>
+          <p:cNvPr id="66" name="tb"/>
           <p:cNvSpPr txBox="1"/>
           <p:nvPr/>
         </p:nvSpPr>
@@ -25918,7 +26095,7 @@
       </p:sp>
       <p:sp>
         <p:nvSpPr>
-          <p:cNvPr id="65" name="tb"/>
+          <p:cNvPr id="67" name="tb"/>
           <p:cNvSpPr txBox="1"/>
           <p:nvPr/>
         </p:nvSpPr>
@@ -25957,7 +26134,7 @@
       </p:sp>
       <p:cxnSp>
         <p:nvCxnSpPr>
-          <p:cNvPr id="66" name="ln"/>
+          <p:cNvPr id="68" name="ln"/>
           <p:cNvCxnSpPr/>
           <p:nvPr/>
         </p:nvCxnSpPr>
@@ -25978,7 +26155,7 @@
       </p:cxnSp>
       <p:sp>
         <p:nvSpPr>
-          <p:cNvPr id="67" name="card"/>
+          <p:cNvPr id="69" name="card"/>
           <p:cNvSpPr/>
           <p:nvPr/>
         </p:nvSpPr>
@@ -26040,7 +26217,7 @@
       </p:sp>
       <p:sp>
         <p:nvSpPr>
-          <p:cNvPr id="68" name="card"/>
+          <p:cNvPr id="70" name="card"/>
           <p:cNvSpPr/>
           <p:nvPr/>
         </p:nvSpPr>
@@ -26105,7 +26282,7 @@
       </p:sp>
       <p:sp>
         <p:nvSpPr>
-          <p:cNvPr id="69" name="ar"/>
+          <p:cNvPr id="71" name="ar"/>
           <p:cNvSpPr/>
           <p:nvPr/>
         </p:nvSpPr>
@@ -26128,7 +26305,7 @@
       </p:sp>
       <p:sp>
         <p:nvSpPr>
-          <p:cNvPr id="70" name="card"/>
+          <p:cNvPr id="72" name="card"/>
           <p:cNvSpPr/>
           <p:nvPr/>
         </p:nvSpPr>
@@ -26193,7 +26370,7 @@
       </p:sp>
       <p:sp>
         <p:nvSpPr>
-          <p:cNvPr id="71" name="ar"/>
+          <p:cNvPr id="73" name="ar"/>
           <p:cNvSpPr/>
           <p:nvPr/>
         </p:nvSpPr>
@@ -26216,7 +26393,7 @@
       </p:sp>
       <p:sp>
         <p:nvSpPr>
-          <p:cNvPr id="72" name="card"/>
+          <p:cNvPr id="74" name="card"/>
           <p:cNvSpPr/>
           <p:nvPr/>
         </p:nvSpPr>
@@ -26281,7 +26458,7 @@
       </p:sp>
       <p:sp>
         <p:nvSpPr>
-          <p:cNvPr id="73" name="ar"/>
+          <p:cNvPr id="75" name="ar"/>
           <p:cNvSpPr/>
           <p:nvPr/>
         </p:nvSpPr>
@@ -26304,7 +26481,7 @@
       </p:sp>
       <p:sp>
         <p:nvSpPr>
-          <p:cNvPr id="74" name="card"/>
+          <p:cNvPr id="76" name="card"/>
           <p:cNvSpPr/>
           <p:nvPr/>
         </p:nvSpPr>
@@ -26369,7 +26546,7 @@
       </p:sp>
       <p:sp>
         <p:nvSpPr>
-          <p:cNvPr id="75" name="ar"/>
+          <p:cNvPr id="77" name="ar"/>
           <p:cNvSpPr/>
           <p:nvPr/>
         </p:nvSpPr>
@@ -26392,7 +26569,7 @@
       </p:sp>
       <p:sp>
         <p:nvSpPr>
-          <p:cNvPr id="76" name="card"/>
+          <p:cNvPr id="78" name="card"/>
           <p:cNvSpPr/>
           <p:nvPr/>
         </p:nvSpPr>
@@ -26440,7 +26617,7 @@
       </p:sp>
       <p:sp>
         <p:nvSpPr>
-          <p:cNvPr id="77" name="card"/>
+          <p:cNvPr id="79" name="card"/>
           <p:cNvSpPr/>
           <p:nvPr/>
         </p:nvSpPr>
@@ -26502,7 +26679,7 @@
       </p:sp>
       <p:sp>
         <p:nvSpPr>
-          <p:cNvPr id="78" name="card"/>
+          <p:cNvPr id="80" name="card"/>
           <p:cNvSpPr/>
           <p:nvPr/>
         </p:nvSpPr>
@@ -26564,7 +26741,7 @@
       </p:sp>
       <p:sp>
         <p:nvSpPr>
-          <p:cNvPr id="79" name="tb"/>
+          <p:cNvPr id="81" name="tb"/>
           <p:cNvSpPr txBox="1"/>
           <p:nvPr/>
         </p:nvSpPr>
@@ -26603,7 +26780,7 @@
       </p:sp>
       <p:sp>
         <p:nvSpPr>
-          <p:cNvPr id="80" name="tb"/>
+          <p:cNvPr id="82" name="tb"/>
           <p:cNvSpPr txBox="1"/>
           <p:nvPr/>
         </p:nvSpPr>
@@ -26667,7 +26844,7 @@
       </p:grpSpPr>
       <p:sp>
         <p:nvSpPr>
-          <p:cNvPr id="81" name="r"/>
+          <p:cNvPr id="83" name="r"/>
           <p:cNvSpPr/>
           <p:nvPr/>
         </p:nvSpPr>
@@ -26699,7 +26876,7 @@
       </p:sp>
       <p:sp>
         <p:nvSpPr>
-          <p:cNvPr id="82" name="tb"/>
+          <p:cNvPr id="84" name="tb"/>
           <p:cNvSpPr txBox="1"/>
           <p:nvPr/>
         </p:nvSpPr>
@@ -26738,7 +26915,7 @@
       </p:sp>
       <p:sp>
         <p:nvSpPr>
-          <p:cNvPr id="83" name="tb"/>
+          <p:cNvPr id="85" name="tb"/>
           <p:cNvSpPr txBox="1"/>
           <p:nvPr/>
         </p:nvSpPr>
@@ -26777,7 +26954,7 @@
       </p:sp>
       <p:cxnSp>
         <p:nvCxnSpPr>
-          <p:cNvPr id="84" name="ln"/>
+          <p:cNvPr id="86" name="ln"/>
           <p:cNvCxnSpPr/>
           <p:nvPr/>
         </p:nvCxnSpPr>
@@ -26798,7 +26975,7 @@
       </p:cxnSp>
       <p:sp>
         <p:nvSpPr>
-          <p:cNvPr id="85" name="card"/>
+          <p:cNvPr id="87" name="card"/>
           <p:cNvSpPr/>
           <p:nvPr/>
         </p:nvSpPr>
@@ -26864,7 +27041,7 @@
       </p:sp>
       <p:sp>
         <p:nvSpPr>
-          <p:cNvPr id="86" name="card"/>
+          <p:cNvPr id="88" name="card"/>
           <p:cNvSpPr/>
           <p:nvPr/>
         </p:nvSpPr>
@@ -26930,7 +27107,7 @@
       </p:sp>
       <p:sp>
         <p:nvSpPr>
-          <p:cNvPr id="87" name="card"/>
+          <p:cNvPr id="89" name="card"/>
           <p:cNvSpPr/>
           <p:nvPr/>
         </p:nvSpPr>
@@ -26996,7 +27173,7 @@
       </p:sp>
       <p:sp>
         <p:nvSpPr>
-          <p:cNvPr id="88" name="tb"/>
+          <p:cNvPr id="90" name="tb"/>
           <p:cNvSpPr txBox="1"/>
           <p:nvPr/>
         </p:nvSpPr>
@@ -27035,7 +27212,7 @@
       </p:sp>
       <p:sp>
         <p:nvSpPr>
-          <p:cNvPr id="89" name="tb"/>
+          <p:cNvPr id="91" name="tb"/>
           <p:cNvSpPr txBox="1"/>
           <p:nvPr/>
         </p:nvSpPr>
@@ -27099,7 +27276,7 @@
       </p:grpSpPr>
       <p:sp>
         <p:nvSpPr>
-          <p:cNvPr id="90" name="r"/>
+          <p:cNvPr id="92" name="r"/>
           <p:cNvSpPr/>
           <p:nvPr/>
         </p:nvSpPr>
@@ -27131,7 +27308,7 @@
       </p:sp>
       <p:sp>
         <p:nvSpPr>
-          <p:cNvPr id="91" name="tb"/>
+          <p:cNvPr id="93" name="tb"/>
           <p:cNvSpPr txBox="1"/>
           <p:nvPr/>
         </p:nvSpPr>
@@ -27170,7 +27347,7 @@
       </p:sp>
       <p:sp>
         <p:nvSpPr>
-          <p:cNvPr id="92" name="tb"/>
+          <p:cNvPr id="94" name="tb"/>
           <p:cNvSpPr txBox="1"/>
           <p:nvPr/>
         </p:nvSpPr>
@@ -27209,7 +27386,7 @@
       </p:sp>
       <p:cxnSp>
         <p:nvCxnSpPr>
-          <p:cNvPr id="93" name="ln"/>
+          <p:cNvPr id="95" name="ln"/>
           <p:cNvCxnSpPr/>
           <p:nvPr/>
         </p:nvCxnSpPr>
@@ -27230,7 +27407,7 @@
       </p:cxnSp>
       <p:sp>
         <p:nvSpPr>
-          <p:cNvPr id="94" name="card"/>
+          <p:cNvPr id="96" name="card"/>
           <p:cNvSpPr/>
           <p:nvPr/>
         </p:nvSpPr>
@@ -27278,7 +27455,7 @@
       </p:sp>
       <p:sp>
         <p:nvSpPr>
-          <p:cNvPr id="95" name="ar"/>
+          <p:cNvPr id="97" name="ar"/>
           <p:cNvSpPr/>
           <p:nvPr/>
         </p:nvSpPr>
@@ -27301,7 +27478,7 @@
       </p:sp>
       <p:sp>
         <p:nvSpPr>
-          <p:cNvPr id="96" name="card"/>
+          <p:cNvPr id="98" name="card"/>
           <p:cNvSpPr/>
           <p:nvPr/>
         </p:nvSpPr>
@@ -27349,7 +27526,7 @@
       </p:sp>
       <p:sp>
         <p:nvSpPr>
-          <p:cNvPr id="97" name="ar"/>
+          <p:cNvPr id="99" name="ar"/>
           <p:cNvSpPr/>
           <p:nvPr/>
         </p:nvSpPr>
@@ -27372,7 +27549,7 @@
       </p:sp>
       <p:sp>
         <p:nvSpPr>
-          <p:cNvPr id="98" name="card"/>
+          <p:cNvPr id="100" name="card"/>
           <p:cNvSpPr/>
           <p:nvPr/>
         </p:nvSpPr>
@@ -27420,7 +27597,7 @@
       </p:sp>
       <p:sp>
         <p:nvSpPr>
-          <p:cNvPr id="99" name="ar"/>
+          <p:cNvPr id="101" name="ar"/>
           <p:cNvSpPr/>
           <p:nvPr/>
         </p:nvSpPr>
@@ -27443,7 +27620,7 @@
       </p:sp>
       <p:sp>
         <p:nvSpPr>
-          <p:cNvPr id="100" name="card"/>
+          <p:cNvPr id="102" name="card"/>
           <p:cNvSpPr/>
           <p:nvPr/>
         </p:nvSpPr>
@@ -27491,7 +27668,7 @@
       </p:sp>
       <p:sp>
         <p:nvSpPr>
-          <p:cNvPr id="101" name="ar"/>
+          <p:cNvPr id="103" name="ar"/>
           <p:cNvSpPr/>
           <p:nvPr/>
         </p:nvSpPr>
@@ -27514,7 +27691,7 @@
       </p:sp>
       <p:sp>
         <p:nvSpPr>
-          <p:cNvPr id="102" name="card"/>
+          <p:cNvPr id="104" name="card"/>
           <p:cNvSpPr/>
           <p:nvPr/>
         </p:nvSpPr>
@@ -27562,7 +27739,7 @@
       </p:sp>
       <p:sp>
         <p:nvSpPr>
-          <p:cNvPr id="103" name="ar"/>
+          <p:cNvPr id="105" name="ar"/>
           <p:cNvSpPr/>
           <p:nvPr/>
         </p:nvSpPr>
@@ -27585,7 +27762,7 @@
       </p:sp>
       <p:sp>
         <p:nvSpPr>
-          <p:cNvPr id="104" name="card"/>
+          <p:cNvPr id="106" name="card"/>
           <p:cNvSpPr/>
           <p:nvPr/>
         </p:nvSpPr>
@@ -27638,7 +27815,7 @@
       </p:sp>
       <p:sp>
         <p:nvSpPr>
-          <p:cNvPr id="105" name="ar"/>
+          <p:cNvPr id="107" name="ar"/>
           <p:cNvSpPr/>
           <p:nvPr/>
         </p:nvSpPr>
@@ -27661,7 +27838,7 @@
       </p:sp>
       <p:sp>
         <p:nvSpPr>
-          <p:cNvPr id="106" name="card"/>
+          <p:cNvPr id="108" name="card"/>
           <p:cNvSpPr/>
           <p:nvPr/>
         </p:nvSpPr>
@@ -27714,7 +27891,7 @@
       </p:sp>
       <p:sp>
         <p:nvSpPr>
-          <p:cNvPr id="107" name="card"/>
+          <p:cNvPr id="109" name="card"/>
           <p:cNvSpPr/>
           <p:nvPr/>
         </p:nvSpPr>
@@ -27776,7 +27953,7 @@
       </p:sp>
       <p:sp>
         <p:nvSpPr>
-          <p:cNvPr id="108" name="tb"/>
+          <p:cNvPr id="110" name="tb"/>
           <p:cNvSpPr txBox="1"/>
           <p:nvPr/>
         </p:nvSpPr>
@@ -27815,7 +27992,7 @@
       </p:sp>
       <p:sp>
         <p:nvSpPr>
-          <p:cNvPr id="109" name="tb"/>
+          <p:cNvPr id="111" name="tb"/>
           <p:cNvSpPr txBox="1"/>
           <p:nvPr/>
         </p:nvSpPr>
@@ -27879,7 +28056,7 @@
       </p:grpSpPr>
       <p:sp>
         <p:nvSpPr>
-          <p:cNvPr id="110" name="r"/>
+          <p:cNvPr id="112" name="r"/>
           <p:cNvSpPr/>
           <p:nvPr/>
         </p:nvSpPr>
@@ -27911,7 +28088,7 @@
       </p:sp>
       <p:sp>
         <p:nvSpPr>
-          <p:cNvPr id="111" name="tb"/>
+          <p:cNvPr id="113" name="tb"/>
           <p:cNvSpPr txBox="1"/>
           <p:nvPr/>
         </p:nvSpPr>
@@ -27950,7 +28127,7 @@
       </p:sp>
       <p:sp>
         <p:nvSpPr>
-          <p:cNvPr id="112" name="tb"/>
+          <p:cNvPr id="114" name="tb"/>
           <p:cNvSpPr txBox="1"/>
           <p:nvPr/>
         </p:nvSpPr>
@@ -27989,7 +28166,7 @@
       </p:sp>
       <p:cxnSp>
         <p:nvCxnSpPr>
-          <p:cNvPr id="113" name="ln"/>
+          <p:cNvPr id="115" name="ln"/>
           <p:cNvCxnSpPr/>
           <p:nvPr/>
         </p:nvCxnSpPr>
@@ -28010,7 +28187,7 @@
       </p:cxnSp>
       <p:sp>
         <p:nvSpPr>
-          <p:cNvPr id="114" name="r"/>
+          <p:cNvPr id="116" name="r"/>
           <p:cNvSpPr/>
           <p:nvPr/>
         </p:nvSpPr>
@@ -28054,7 +28231,7 @@
       </p:sp>
       <p:sp>
         <p:nvSpPr>
-          <p:cNvPr id="115" name="r"/>
+          <p:cNvPr id="117" name="r"/>
           <p:cNvSpPr/>
           <p:nvPr/>
         </p:nvSpPr>
@@ -28098,7 +28275,7 @@
       </p:sp>
       <p:sp>
         <p:nvSpPr>
-          <p:cNvPr id="116" name="r"/>
+          <p:cNvPr id="118" name="r"/>
           <p:cNvSpPr/>
           <p:nvPr/>
         </p:nvSpPr>
@@ -28142,7 +28319,7 @@
       </p:sp>
       <p:sp>
         <p:nvSpPr>
-          <p:cNvPr id="117" name="r"/>
+          <p:cNvPr id="119" name="r"/>
           <p:cNvSpPr/>
           <p:nvPr/>
         </p:nvSpPr>
@@ -28186,7 +28363,7 @@
       </p:sp>
       <p:sp>
         <p:nvSpPr>
-          <p:cNvPr id="118" name="r"/>
+          <p:cNvPr id="120" name="r"/>
           <p:cNvSpPr/>
           <p:nvPr/>
         </p:nvSpPr>
@@ -28232,7 +28409,7 @@
       </p:sp>
       <p:sp>
         <p:nvSpPr>
-          <p:cNvPr id="119" name="r"/>
+          <p:cNvPr id="121" name="r"/>
           <p:cNvSpPr/>
           <p:nvPr/>
         </p:nvSpPr>
@@ -28278,7 +28455,7 @@
       </p:sp>
       <p:sp>
         <p:nvSpPr>
-          <p:cNvPr id="120" name="r"/>
+          <p:cNvPr id="122" name="r"/>
           <p:cNvSpPr/>
           <p:nvPr/>
         </p:nvSpPr>
@@ -28324,7 +28501,7 @@
       </p:sp>
       <p:sp>
         <p:nvSpPr>
-          <p:cNvPr id="121" name="r"/>
+          <p:cNvPr id="123" name="r"/>
           <p:cNvSpPr/>
           <p:nvPr/>
         </p:nvSpPr>
@@ -28370,7 +28547,7 @@
       </p:sp>
       <p:sp>
         <p:nvSpPr>
-          <p:cNvPr id="122" name="r"/>
+          <p:cNvPr id="124" name="r"/>
           <p:cNvSpPr/>
           <p:nvPr/>
         </p:nvSpPr>
@@ -28416,7 +28593,7 @@
       </p:sp>
       <p:sp>
         <p:nvSpPr>
-          <p:cNvPr id="123" name="r"/>
+          <p:cNvPr id="125" name="r"/>
           <p:cNvSpPr/>
           <p:nvPr/>
         </p:nvSpPr>
@@ -28462,7 +28639,7 @@
       </p:sp>
       <p:sp>
         <p:nvSpPr>
-          <p:cNvPr id="124" name="r"/>
+          <p:cNvPr id="126" name="r"/>
           <p:cNvSpPr/>
           <p:nvPr/>
         </p:nvSpPr>
@@ -28508,7 +28685,7 @@
       </p:sp>
       <p:sp>
         <p:nvSpPr>
-          <p:cNvPr id="125" name="r"/>
+          <p:cNvPr id="127" name="r"/>
           <p:cNvSpPr/>
           <p:nvPr/>
         </p:nvSpPr>
@@ -28554,7 +28731,7 @@
       </p:sp>
       <p:sp>
         <p:nvSpPr>
-          <p:cNvPr id="126" name="r"/>
+          <p:cNvPr id="128" name="r"/>
           <p:cNvSpPr/>
           <p:nvPr/>
         </p:nvSpPr>
@@ -28600,7 +28777,7 @@
       </p:sp>
       <p:sp>
         <p:nvSpPr>
-          <p:cNvPr id="127" name="r"/>
+          <p:cNvPr id="129" name="r"/>
           <p:cNvSpPr/>
           <p:nvPr/>
         </p:nvSpPr>
@@ -28646,7 +28823,7 @@
       </p:sp>
       <p:sp>
         <p:nvSpPr>
-          <p:cNvPr id="128" name="r"/>
+          <p:cNvPr id="130" name="r"/>
           <p:cNvSpPr/>
           <p:nvPr/>
         </p:nvSpPr>
@@ -28692,7 +28869,7 @@
       </p:sp>
       <p:sp>
         <p:nvSpPr>
-          <p:cNvPr id="129" name="r"/>
+          <p:cNvPr id="131" name="r"/>
           <p:cNvSpPr/>
           <p:nvPr/>
         </p:nvSpPr>
@@ -28738,7 +28915,7 @@
       </p:sp>
       <p:sp>
         <p:nvSpPr>
-          <p:cNvPr id="130" name="r"/>
+          <p:cNvPr id="132" name="r"/>
           <p:cNvSpPr/>
           <p:nvPr/>
         </p:nvSpPr>
@@ -28784,7 +28961,7 @@
       </p:sp>
       <p:sp>
         <p:nvSpPr>
-          <p:cNvPr id="131" name="r"/>
+          <p:cNvPr id="133" name="r"/>
           <p:cNvSpPr/>
           <p:nvPr/>
         </p:nvSpPr>
@@ -28830,7 +29007,7 @@
       </p:sp>
       <p:sp>
         <p:nvSpPr>
-          <p:cNvPr id="132" name="r"/>
+          <p:cNvPr id="134" name="r"/>
           <p:cNvSpPr/>
           <p:nvPr/>
         </p:nvSpPr>
@@ -28876,7 +29053,7 @@
       </p:sp>
       <p:sp>
         <p:nvSpPr>
-          <p:cNvPr id="133" name="r"/>
+          <p:cNvPr id="135" name="r"/>
           <p:cNvSpPr/>
           <p:nvPr/>
         </p:nvSpPr>
@@ -28922,7 +29099,7 @@
       </p:sp>
       <p:sp>
         <p:nvSpPr>
-          <p:cNvPr id="134" name="r"/>
+          <p:cNvPr id="136" name="r"/>
           <p:cNvSpPr/>
           <p:nvPr/>
         </p:nvSpPr>
@@ -28968,7 +29145,7 @@
       </p:sp>
       <p:sp>
         <p:nvSpPr>
-          <p:cNvPr id="135" name="r"/>
+          <p:cNvPr id="137" name="r"/>
           <p:cNvSpPr/>
           <p:nvPr/>
         </p:nvSpPr>
@@ -29014,7 +29191,7 @@
       </p:sp>
       <p:sp>
         <p:nvSpPr>
-          <p:cNvPr id="136" name="r"/>
+          <p:cNvPr id="138" name="r"/>
           <p:cNvSpPr/>
           <p:nvPr/>
         </p:nvSpPr>
@@ -29060,7 +29237,7 @@
       </p:sp>
       <p:sp>
         <p:nvSpPr>
-          <p:cNvPr id="137" name="r"/>
+          <p:cNvPr id="139" name="r"/>
           <p:cNvSpPr/>
           <p:nvPr/>
         </p:nvSpPr>
@@ -29106,7 +29283,7 @@
       </p:sp>
       <p:sp>
         <p:nvSpPr>
-          <p:cNvPr id="138" name="card"/>
+          <p:cNvPr id="140" name="card"/>
           <p:cNvSpPr/>
           <p:nvPr/>
         </p:nvSpPr>
@@ -29168,7 +29345,7 @@
       </p:sp>
       <p:sp>
         <p:nvSpPr>
-          <p:cNvPr id="139" name="tb"/>
+          <p:cNvPr id="141" name="tb"/>
           <p:cNvSpPr txBox="1"/>
           <p:nvPr/>
         </p:nvSpPr>
@@ -29207,7 +29384,7 @@
       </p:sp>
       <p:sp>
         <p:nvSpPr>
-          <p:cNvPr id="140" name="tb"/>
+          <p:cNvPr id="142" name="tb"/>
           <p:cNvSpPr txBox="1"/>
           <p:nvPr/>
         </p:nvSpPr>
